--- a/презентация.pptx
+++ b/презентация.pptx
@@ -4,6 +4,9 @@
   <p:sldMasterIdLst>
     <p:sldMasterId id="2147483648" r:id="rId1"/>
   </p:sldMasterIdLst>
+  <p:notesMasterIdLst>
+    <p:notesMasterId r:id="rId15"/>
+  </p:notesMasterIdLst>
   <p:sldIdLst>
     <p:sldId id="256" r:id="rId2"/>
     <p:sldId id="257" r:id="rId3"/>
@@ -17,11 +20,9 @@
     <p:sldId id="265" r:id="rId11"/>
     <p:sldId id="266" r:id="rId12"/>
     <p:sldId id="267" r:id="rId13"/>
+    <p:sldId id="268" r:id="rId14"/>
   </p:sldIdLst>
-  <p:notesMasterIdLst>
-    <p:notesMasterId r:id="rId14"/>
-  </p:notesMasterIdLst>
-  <p:sldSz cx="9144000" cy="5143500"/>
+  <p:sldSz cx="9144000" cy="5143500" type="screen16x9"/>
   <p:notesSz cx="5143500" cy="9144000"/>
   <p:defaultTextStyle>
     <a:lvl1pPr marL="0" algn="l" defTabSz="914400" rtl="0" eaLnBrk="1" latinLnBrk="0" hangingPunct="1">
@@ -115,6 +116,11 @@
       </a:defRPr>
     </a:lvl9pPr>
   </p:defaultTextStyle>
+  <p:extLst>
+    <p:ext uri="{EFAFB233-063F-42B5-8137-9DF3F51BA10A}">
+      <p15:sldGuideLst xmlns:p15="http://schemas.microsoft.com/office/powerpoint/2012/main"/>
+    </p:ext>
+  </p:extLst>
 </p:presentation>
 </file>
 
@@ -140,234 +146,10 @@
           <a:chExt cx="0" cy="0"/>
         </a:xfrm>
       </p:grpSpPr>
-      <p:sp>
-        <p:nvSpPr>
-          <p:cNvPr id="2" name="Header Placeholder 1"/>
-          <p:cNvSpPr>
-            <a:spLocks noGrp="1"/>
-          </p:cNvSpPr>
-          <p:nvPr>
-            <p:ph type="hdr" sz="quarter"/>
-          </p:nvPr>
-        </p:nvSpPr>
-        <p:spPr>
-          <a:xfrm>
-            <a:off x="0" y="0"/>
-            <a:ext cx="2971800" cy="458788"/>
-          </a:xfrm>
-          <a:prstGeom prst="rect">
-            <a:avLst/>
-          </a:prstGeom>
-        </p:spPr>
-        <p:txBody>
-          <a:bodyPr vert="horz" lIns="91440" tIns="45720" rIns="91440" bIns="45720" rtlCol="0"/>
-          <a:lstStyle>
-            <a:lvl1pPr algn="l">
-              <a:defRPr sz="1200"/>
-            </a:lvl1pPr>
-          </a:lstStyle>
-          <a:p>
-            <a:endParaRPr lang="en-US"/>
-          </a:p>
-        </p:txBody>
-      </p:sp>
-      <p:sp>
-        <p:nvSpPr>
-          <p:cNvPr id="3" name="Date Placeholder 2"/>
-          <p:cNvSpPr>
-            <a:spLocks noGrp="1"/>
-          </p:cNvSpPr>
-          <p:nvPr>
-            <p:ph type="dt" idx="1"/>
-          </p:nvPr>
-        </p:nvSpPr>
-        <p:spPr>
-          <a:xfrm>
-            <a:off x="3884613" y="0"/>
-            <a:ext cx="2971800" cy="458788"/>
-          </a:xfrm>
-          <a:prstGeom prst="rect">
-            <a:avLst/>
-          </a:prstGeom>
-        </p:spPr>
-        <p:txBody>
-          <a:bodyPr vert="horz" lIns="91440" tIns="45720" rIns="91440" bIns="45720" rtlCol="0"/>
-          <a:lstStyle>
-            <a:lvl1pPr algn="r">
-              <a:defRPr sz="1200"/>
-            </a:lvl1pPr>
-          </a:lstStyle>
-          <a:p>
-            <a:fld id="{5282F153-3F37-0F45-9E97-73ACFA13230C}" type="datetimeFigureOut">
-              <a:rPr lang="en-US"/>
-              <a:t>7/23/19</a:t>
-            </a:fld>
-            <a:endParaRPr lang="en-US"/>
-          </a:p>
-        </p:txBody>
-      </p:sp>
-      <p:sp>
-        <p:nvSpPr>
-          <p:cNvPr id="4" name="Slide Image Placeholder 3"/>
-          <p:cNvSpPr>
-            <a:spLocks noGrp="1" noRot="1" noChangeAspect="1"/>
-          </p:cNvSpPr>
-          <p:nvPr>
-            <p:ph type="sldImg" idx="2"/>
-          </p:nvPr>
-        </p:nvSpPr>
-        <p:spPr>
-          <a:xfrm>
-            <a:off x="685800" y="1143000"/>
-            <a:ext cx="5486400" cy="3086100"/>
-          </a:xfrm>
-          <a:prstGeom prst="rect">
-            <a:avLst/>
-          </a:prstGeom>
-          <a:noFill/>
-          <a:ln w="12700">
-            <a:solidFill>
-              <a:prstClr val="black"/>
-            </a:solidFill>
-          </a:ln>
-        </p:spPr>
-        <p:txBody>
-          <a:bodyPr vert="horz" lIns="91440" tIns="45720" rIns="91440" bIns="45720" rtlCol="0" anchor="ctr"/>
-          <a:lstStyle/>
-          <a:p>
-            <a:endParaRPr lang="en-US"/>
-          </a:p>
-        </p:txBody>
-      </p:sp>
-      <p:sp>
-        <p:nvSpPr>
-          <p:cNvPr id="5" name="Notes Placeholder 4"/>
-          <p:cNvSpPr>
-            <a:spLocks noGrp="1"/>
-          </p:cNvSpPr>
-          <p:nvPr>
-            <p:ph type="body" sz="quarter" idx="3"/>
-          </p:nvPr>
-        </p:nvSpPr>
-        <p:spPr>
-          <a:xfrm>
-            <a:off x="685800" y="4400550"/>
-            <a:ext cx="5486400" cy="3600450"/>
-          </a:xfrm>
-          <a:prstGeom prst="rect">
-            <a:avLst/>
-          </a:prstGeom>
-        </p:spPr>
-        <p:txBody>
-          <a:bodyPr vert="horz" lIns="91440" tIns="45720" rIns="91440" bIns="45720" rtlCol="0"/>
-          <a:lstStyle/>
-          <a:p>
-            <a:pPr lvl="0"/>
-            <a:r>
-              <a:rPr lang="en-US"/>
-              <a:t>Click to edit Master text styles</a:t>
-            </a:r>
-          </a:p>
-          <a:p>
-            <a:pPr lvl="1"/>
-            <a:r>
-              <a:rPr lang="en-US"/>
-              <a:t>Second level</a:t>
-            </a:r>
-          </a:p>
-          <a:p>
-            <a:pPr lvl="2"/>
-            <a:r>
-              <a:rPr lang="en-US"/>
-              <a:t>Third level</a:t>
-            </a:r>
-          </a:p>
-          <a:p>
-            <a:pPr lvl="3"/>
-            <a:r>
-              <a:rPr lang="en-US"/>
-              <a:t>Fourth level</a:t>
-            </a:r>
-          </a:p>
-          <a:p>
-            <a:pPr lvl="4"/>
-            <a:r>
-              <a:rPr lang="en-US"/>
-              <a:t>Fifth level</a:t>
-            </a:r>
-          </a:p>
-        </p:txBody>
-      </p:sp>
-      <p:sp>
-        <p:nvSpPr>
-          <p:cNvPr id="6" name="Footer Placeholder 5"/>
-          <p:cNvSpPr>
-            <a:spLocks noGrp="1"/>
-          </p:cNvSpPr>
-          <p:nvPr>
-            <p:ph type="ftr" sz="quarter" idx="4"/>
-          </p:nvPr>
-        </p:nvSpPr>
-        <p:spPr>
-          <a:xfrm>
-            <a:off x="0" y="8685213"/>
-            <a:ext cx="2971800" cy="458787"/>
-          </a:xfrm>
-          <a:prstGeom prst="rect">
-            <a:avLst/>
-          </a:prstGeom>
-        </p:spPr>
-        <p:txBody>
-          <a:bodyPr vert="horz" lIns="91440" tIns="45720" rIns="91440" bIns="45720" rtlCol="0" anchor="b"/>
-          <a:lstStyle>
-            <a:lvl1pPr algn="l">
-              <a:defRPr sz="1200"/>
-            </a:lvl1pPr>
-          </a:lstStyle>
-          <a:p>
-            <a:endParaRPr lang="en-US"/>
-          </a:p>
-        </p:txBody>
-      </p:sp>
-      <p:sp>
-        <p:nvSpPr>
-          <p:cNvPr id="7" name="Slide Number Placeholder 6"/>
-          <p:cNvSpPr>
-            <a:spLocks noGrp="1"/>
-          </p:cNvSpPr>
-          <p:nvPr>
-            <p:ph type="sldNum" sz="quarter" idx="5"/>
-          </p:nvPr>
-        </p:nvSpPr>
-        <p:spPr>
-          <a:xfrm>
-            <a:off x="3884613" y="8685213"/>
-            <a:ext cx="2971800" cy="458787"/>
-          </a:xfrm>
-          <a:prstGeom prst="rect">
-            <a:avLst/>
-          </a:prstGeom>
-        </p:spPr>
-        <p:txBody>
-          <a:bodyPr vert="horz" lIns="91440" tIns="45720" rIns="91440" bIns="45720" rtlCol="0" anchor="b"/>
-          <a:lstStyle>
-            <a:lvl1pPr algn="r">
-              <a:defRPr sz="1200"/>
-            </a:lvl1pPr>
-          </a:lstStyle>
-          <a:p>
-            <a:fld id="{CE5E9CC1-C706-0F49-92D6-E571CC5EEA8F}" type="slidenum">
-              <a:rPr lang="en-US"/>
-              <a:t>‹#›</a:t>
-            </a:fld>
-            <a:endParaRPr lang="en-US"/>
-          </a:p>
-        </p:txBody>
-      </p:sp>
     </p:spTree>
     <p:extLst>
       <p:ext uri="{BB962C8B-B14F-4D97-AF65-F5344CB8AC3E}">
-        <p14:creationId xmlns:p14="http://schemas.microsoft.com/office/powerpoint/2010/main" val="1024086991"/>
+        <p14:creationId xmlns:p14="http://schemas.microsoft.com/office/powerpoint/2010/main" val="691717625"/>
       </p:ext>
     </p:extLst>
   </p:cSld>
@@ -516,7 +298,6 @@
               <a:t>СЛАЙД 1 (~15 сек)
 Добрый день! Меня зовут Тушинский Никита, группа ИСП-42. Тема проекта — разработка сайта-конструктора рецептов с умной фильтрацией по ингредиентам на Django.</a:t>
             </a:r>
-            <a:endParaRPr lang="en-US" dirty="0"/>
           </a:p>
         </p:txBody>
       </p:sp>
@@ -606,7 +387,6 @@
 Admin-панель позволяет управлять данными без кода. Для Many-to-Many настроен удобный виджет filter_horizontal. Маршрутизация включает три маршрута: главная, результаты и панель администратора.
 &gt;&gt;&gt; ПОКАЗАТЬ СКРИНШОТ admin-панели</a:t>
             </a:r>
-            <a:endParaRPr lang="en-US" dirty="0"/>
           </a:p>
         </p:txBody>
       </p:sp>
@@ -695,7 +475,6 @@
               <a:t>СЛАЙД 11 (~25 сек)
 Тестирование на 50 ингредиентах и 15 рецептах. Пять сценариев покрывают все граничные случаи: полное совпадение, частичное, ноль совпадений, равные веса. Все тесты пройдены.</a:t>
             </a:r>
-            <a:endParaRPr lang="en-US" dirty="0"/>
           </a:p>
         </p:txBody>
       </p:sp>
@@ -784,7 +563,6 @@
               <a:t>СЛАЙД 12 (~15 сек)
 Все задачи выполнены. Проект имеет реальную практическую ценность — помогает сократить пищевые отходы. Перспективы: личные кабинеты, КБЖУ, UGC, PWA. Спасибо за внимание!</a:t>
             </a:r>
-            <a:endParaRPr lang="en-US" dirty="0"/>
           </a:p>
         </p:txBody>
       </p:sp>
@@ -815,6 +593,118 @@
     <p:extLst>
       <p:ext uri="{BB962C8B-B14F-4D97-AF65-F5344CB8AC3E}">
         <p14:creationId xmlns:p14="http://schemas.microsoft.com/office/powerpoint/2010/main" val="1024086991"/>
+      </p:ext>
+    </p:extLst>
+  </p:cSld>
+  <p:clrMapOvr>
+    <a:masterClrMapping/>
+  </p:clrMapOvr>
+</p:notes>
+</file>
+
+<file path=ppt/notesSlides/notesSlide13.xml><?xml version="1.0" encoding="utf-8"?>
+<p:notes xmlns:a="http://schemas.openxmlformats.org/drawingml/2006/main" xmlns:r="http://schemas.openxmlformats.org/officeDocument/2006/relationships" xmlns:p="http://schemas.openxmlformats.org/presentationml/2006/main">
+  <p:cSld>
+    <p:spTree>
+      <p:nvGrpSpPr>
+        <p:cNvPr id="1" name="">
+          <a:extLst>
+            <a:ext uri="{FF2B5EF4-FFF2-40B4-BE49-F238E27FC236}">
+              <a16:creationId xmlns:a16="http://schemas.microsoft.com/office/drawing/2014/main" id="{FF272B06-0B4B-7CAC-F62E-95A2FF6067DF}"/>
+            </a:ext>
+          </a:extLst>
+        </p:cNvPr>
+        <p:cNvGrpSpPr/>
+        <p:nvPr/>
+      </p:nvGrpSpPr>
+      <p:grpSpPr>
+        <a:xfrm>
+          <a:off x="0" y="0"/>
+          <a:ext cx="0" cy="0"/>
+          <a:chOff x="0" y="0"/>
+          <a:chExt cx="0" cy="0"/>
+        </a:xfrm>
+      </p:grpSpPr>
+      <p:sp>
+        <p:nvSpPr>
+          <p:cNvPr id="2" name="Slide Image Placeholder 1">
+            <a:extLst>
+              <a:ext uri="{FF2B5EF4-FFF2-40B4-BE49-F238E27FC236}">
+                <a16:creationId xmlns:a16="http://schemas.microsoft.com/office/drawing/2014/main" id="{EE034600-46FB-BC52-7A48-DA606350B117}"/>
+              </a:ext>
+            </a:extLst>
+          </p:cNvPr>
+          <p:cNvSpPr>
+            <a:spLocks noGrp="1" noRot="1" noChangeAspect="1"/>
+          </p:cNvSpPr>
+          <p:nvPr>
+            <p:ph type="sldImg"/>
+          </p:nvPr>
+        </p:nvSpPr>
+        <p:spPr/>
+      </p:sp>
+      <p:sp>
+        <p:nvSpPr>
+          <p:cNvPr id="3" name="Notes Placeholder 2">
+            <a:extLst>
+              <a:ext uri="{FF2B5EF4-FFF2-40B4-BE49-F238E27FC236}">
+                <a16:creationId xmlns:a16="http://schemas.microsoft.com/office/drawing/2014/main" id="{66AC0210-C53B-AA53-9560-321D9F738E2A}"/>
+              </a:ext>
+            </a:extLst>
+          </p:cNvPr>
+          <p:cNvSpPr>
+            <a:spLocks noGrp="1"/>
+          </p:cNvSpPr>
+          <p:nvPr>
+            <p:ph type="body" idx="1"/>
+          </p:nvPr>
+        </p:nvSpPr>
+        <p:spPr/>
+        <p:txBody>
+          <a:bodyPr/>
+          <a:lstStyle/>
+          <a:p>
+            <a:r>
+              <a:rPr lang="en-US" dirty="0"/>
+              <a:t>СЛАЙД 12 (~15 сек)
+Все задачи выполнены. Проект имеет реальную практическую ценность — помогает сократить пищевые отходы. Перспективы: личные кабинеты, КБЖУ, UGC, PWA. Спасибо за внимание!</a:t>
+            </a:r>
+          </a:p>
+        </p:txBody>
+      </p:sp>
+      <p:sp>
+        <p:nvSpPr>
+          <p:cNvPr id="4" name="Slide Number Placeholder 3">
+            <a:extLst>
+              <a:ext uri="{FF2B5EF4-FFF2-40B4-BE49-F238E27FC236}">
+                <a16:creationId xmlns:a16="http://schemas.microsoft.com/office/drawing/2014/main" id="{D7517F80-8FCC-EFB6-9622-6AC6BFCB7D23}"/>
+              </a:ext>
+            </a:extLst>
+          </p:cNvPr>
+          <p:cNvSpPr>
+            <a:spLocks noGrp="1"/>
+          </p:cNvSpPr>
+          <p:nvPr>
+            <p:ph type="sldNum" sz="quarter" idx="10"/>
+          </p:nvPr>
+        </p:nvSpPr>
+        <p:spPr/>
+        <p:txBody>
+          <a:bodyPr/>
+          <a:lstStyle/>
+          <a:p>
+            <a:fld id="{F7021451-1387-4CA6-816F-3879F97B5CBC}" type="slidenum">
+              <a:rPr lang="en-US"/>
+              <a:t>13</a:t>
+            </a:fld>
+            <a:endParaRPr lang="en-US"/>
+          </a:p>
+        </p:txBody>
+      </p:sp>
+    </p:spTree>
+    <p:extLst>
+      <p:ext uri="{BB962C8B-B14F-4D97-AF65-F5344CB8AC3E}">
+        <p14:creationId xmlns:p14="http://schemas.microsoft.com/office/powerpoint/2010/main" val="1660185228"/>
       </p:ext>
     </p:extLst>
   </p:cSld>
@@ -873,7 +763,6 @@
               <a:t>СЛАЙД 2 (~25 сек)
 В современном ритме жизни найти рецепт из того, что есть в холодильнике, — реальная задача. Готовых русскоязычных решений нет. Цель — создать открытый бесплатный инструмент. Аудитория широкая: от домохозяек до начинающих разработчиков.</a:t>
             </a:r>
-            <a:endParaRPr lang="en-US" dirty="0"/>
           </a:p>
         </p:txBody>
       </p:sp>
@@ -962,7 +851,6 @@
               <a:t>СЛАЙД 3 (~20 сек)
 Проект разбит на шесть последовательных задач: от анализа существующих решений до тестирования готового алгоритма. Каждая задача закрывает конкретный этап разработки.</a:t>
             </a:r>
-            <a:endParaRPr lang="en-US" dirty="0"/>
           </a:p>
         </p:txBody>
       </p:sp>
@@ -1051,7 +939,6 @@
               <a:t>СЛАЙД 4 (~30 сек)
 Анализ четырёх сервисов. Supercook и Yummly — зарубежные, без открытого кода. RussianFood не умеет ранжировать по нескольким ингредиентам. Наш проект — единственный с полным набором функций на русском языке.</a:t>
             </a:r>
-            <a:endParaRPr lang="en-US" dirty="0"/>
           </a:p>
         </p:txBody>
       </p:sp>
@@ -1140,7 +1027,6 @@
               <a:t>СЛАЙД 5 (~25 сек)
 Django выбран как наиболее самодостаточный фреймворк. Flask и FastAPI требуют внешних зависимостей. SQLite не требует настройки сервера. DTL уже встроен в Django.</a:t>
             </a:r>
-            <a:endParaRPr lang="en-US" dirty="0"/>
           </a:p>
         </p:txBody>
       </p:sp>
@@ -1229,7 +1115,6 @@
               <a:t>СЛАЙД 6 (~30 сек)
 Две модели — Ingredient и Recipe, связь Many-to-Many. Django сам создаёт промежуточную таблицу. Нормализованная структура: один ингредиент Соль не дублируется в каждом рецепте, а хранится один раз.</a:t>
             </a:r>
-            <a:endParaRPr lang="en-US" dirty="0"/>
           </a:p>
         </p:txBody>
       </p:sp>
@@ -1318,7 +1203,6 @@
               <a:t>СЛАЙД 7 (~35 сек)
 Алгоритм — три шага. Пересечение: что из выбранного есть в рецепте. Вес: сортировка по числу совпадений. Дефицит: список продуктов, которых не хватает. Всё реализовано одним QuerySet через annotate и Count — вычисления идут в SQL, не в Python.</a:t>
             </a:r>
-            <a:endParaRPr lang="en-US" dirty="0"/>
           </a:p>
         </p:txBody>
       </p:sp>
@@ -1408,7 +1292,6 @@
 Главная страница — список чекбоксов. Пользователь отмечает продукты и нажимает поиск. Данные передаются через GET, поэтому URL с выбором можно переслать.
 &gt;&gt;&gt; ПОКАЗАТЬ СКРИНШОТ главной страницы</a:t>
             </a:r>
-            <a:endParaRPr lang="en-US" dirty="0"/>
           </a:p>
         </p:txBody>
       </p:sp>
@@ -1498,7 +1381,6 @@
 На странице результатов — карточки, отсортированные по числу совпадений. Каждая карточка сразу показывает, чего не хватает. Это главная фишка — пользователь сразу видит, что купить.
 &gt;&gt;&gt; ПОКАЗАТЬ СКРИНШОТ страницы результатов</a:t>
             </a:r>
-            <a:endParaRPr lang="en-US" dirty="0"/>
           </a:p>
         </p:txBody>
       </p:sp>
@@ -1571,6 +1453,11 @@
 <file path=ppt/slideMasters/slideMaster1.xml><?xml version="1.0" encoding="utf-8"?>
 <p:sldMaster xmlns:a="http://schemas.openxmlformats.org/drawingml/2006/main" xmlns:r="http://schemas.openxmlformats.org/officeDocument/2006/relationships" xmlns:p="http://schemas.openxmlformats.org/presentationml/2006/main">
   <p:cSld>
+    <p:bg>
+      <p:bgRef idx="1001">
+        <a:schemeClr val="bg1"/>
+      </p:bgRef>
+    </p:bg>
     <p:spTree>
       <p:nvGrpSpPr>
         <p:cNvPr id="1" name=""/>
@@ -1853,6 +1740,7 @@
         <a:solidFill>
           <a:srgbClr val="1A3C2E"/>
         </a:solidFill>
+        <a:effectLst/>
       </p:bgPr>
     </p:bg>
     <p:spTree>
@@ -1893,6 +1781,13 @@
             <a:prstDash val="solid"/>
           </a:ln>
         </p:spPr>
+        <p:txBody>
+          <a:bodyPr/>
+          <a:lstStyle/>
+          <a:p>
+            <a:endParaRPr lang="en-GB"/>
+          </a:p>
+        </p:txBody>
       </p:sp>
       <p:sp>
         <p:nvSpPr>
@@ -1918,6 +1813,13 @@
             <a:prstDash val="solid"/>
           </a:ln>
         </p:spPr>
+        <p:txBody>
+          <a:bodyPr/>
+          <a:lstStyle/>
+          <a:p>
+            <a:endParaRPr lang="en-GB"/>
+          </a:p>
+        </p:txBody>
       </p:sp>
       <p:sp>
         <p:nvSpPr>
@@ -1940,7 +1842,7 @@
           <a:bodyPr wrap="square" rtlCol="0" anchor="ctr"/>
           <a:lstStyle/>
           <a:p>
-            <a:pPr algn="ctr" indent="0" marL="0">
+            <a:pPr marL="0" indent="0" algn="ctr">
               <a:buNone/>
             </a:pPr>
             <a:r>
@@ -1957,7 +1859,7 @@
             <a:endParaRPr lang="en-US" sz="2000" dirty="0"/>
           </a:p>
           <a:p>
-            <a:pPr algn="ctr" indent="0" marL="0">
+            <a:pPr marL="0" indent="0" algn="ctr">
               <a:buNone/>
             </a:pPr>
             <a:r>
@@ -1974,7 +1876,7 @@
             <a:endParaRPr lang="en-US" sz="2000" dirty="0"/>
           </a:p>
           <a:p>
-            <a:pPr algn="ctr" indent="0" marL="0">
+            <a:pPr marL="0" indent="0" algn="ctr">
               <a:buNone/>
             </a:pPr>
             <a:r>
@@ -1991,7 +1893,7 @@
             <a:endParaRPr lang="en-US" sz="2000" dirty="0"/>
           </a:p>
           <a:p>
-            <a:pPr algn="ctr" indent="0" marL="0">
+            <a:pPr marL="0" indent="0" algn="ctr">
               <a:buNone/>
             </a:pPr>
             <a:r>
@@ -2008,7 +1910,7 @@
             <a:endParaRPr lang="en-US" sz="2000" dirty="0"/>
           </a:p>
           <a:p>
-            <a:pPr algn="ctr" indent="0" marL="0">
+            <a:pPr marL="0" indent="0" algn="ctr">
               <a:buNone/>
             </a:pPr>
             <a:r>
@@ -2047,11 +1949,11 @@
           <a:bodyPr wrap="square" rtlCol="0" anchor="ctr"/>
           <a:lstStyle/>
           <a:p>
-            <a:pPr algn="l" indent="0" marL="0">
+            <a:pPr marL="0" indent="0" algn="l">
               <a:buNone/>
             </a:pPr>
             <a:r>
-              <a:rPr lang="en-US" sz="1100" spc="300" kern="0" dirty="0">
+              <a:rPr lang="en-US" sz="1100" kern="0" spc="300" dirty="0">
                 <a:solidFill>
                   <a:srgbClr val="97BC62"/>
                 </a:solidFill>
@@ -2086,7 +1988,7 @@
           <a:bodyPr wrap="square" rtlCol="0" anchor="ctr"/>
           <a:lstStyle/>
           <a:p>
-            <a:pPr algn="l" indent="0" marL="0">
+            <a:pPr marL="0" indent="0" algn="l">
               <a:buNone/>
             </a:pPr>
             <a:r>
@@ -2103,7 +2005,7 @@
             <a:endParaRPr lang="en-US" sz="2800" dirty="0"/>
           </a:p>
           <a:p>
-            <a:pPr algn="l" indent="0" marL="0">
+            <a:pPr marL="0" indent="0" algn="l">
               <a:buNone/>
             </a:pPr>
             <a:r>
@@ -2120,7 +2022,7 @@
             <a:endParaRPr lang="en-US" sz="2800" dirty="0"/>
           </a:p>
           <a:p>
-            <a:pPr algn="l" indent="0" marL="0">
+            <a:pPr marL="0" indent="0" algn="l">
               <a:buNone/>
             </a:pPr>
             <a:r>
@@ -2162,6 +2064,13 @@
             <a:prstDash val="solid"/>
           </a:ln>
         </p:spPr>
+        <p:txBody>
+          <a:bodyPr/>
+          <a:lstStyle/>
+          <a:p>
+            <a:endParaRPr lang="en-GB"/>
+          </a:p>
+        </p:txBody>
       </p:sp>
       <p:sp>
         <p:nvSpPr>
@@ -2184,7 +2093,7 @@
           <a:bodyPr wrap="square" rtlCol="0" anchor="ctr"/>
           <a:lstStyle/>
           <a:p>
-            <a:pPr algn="l" indent="0" marL="0">
+            <a:pPr marL="0" indent="0" algn="l">
               <a:buNone/>
             </a:pPr>
             <a:r>
@@ -2223,7 +2132,7 @@
           <a:bodyPr wrap="square" rtlCol="0" anchor="ctr"/>
           <a:lstStyle/>
           <a:p>
-            <a:pPr algn="l" indent="0" marL="0">
+            <a:pPr marL="0" indent="0" algn="l">
               <a:buNone/>
             </a:pPr>
             <a:r>
@@ -2262,7 +2171,7 @@
           <a:bodyPr wrap="square" rtlCol="0" anchor="ctr"/>
           <a:lstStyle/>
           <a:p>
-            <a:pPr algn="l" indent="0" marL="0">
+            <a:pPr marL="0" indent="0" algn="l">
               <a:buNone/>
             </a:pPr>
             <a:r>
@@ -2296,6 +2205,7 @@
         <a:solidFill>
           <a:srgbClr val="EDF4E8"/>
         </a:solidFill>
+        <a:effectLst/>
       </p:bgPr>
     </p:bg>
     <p:spTree>
@@ -2333,7 +2243,7 @@
           <a:bodyPr wrap="square" lIns="0" tIns="0" rIns="0" bIns="0" rtlCol="0" anchor="ctr"/>
           <a:lstStyle/>
           <a:p>
-            <a:pPr algn="l" indent="0" marL="0">
+            <a:pPr marL="0" indent="0" algn="l">
               <a:buNone/>
             </a:pPr>
             <a:r>
@@ -2375,10 +2285,17 @@
             <a:prstDash val="solid"/>
           </a:ln>
         </p:spPr>
-      </p:sp>
-      <p:sp>
-        <p:nvSpPr>
-          <p:cNvPr id="4" name="Shape 2"/>
+        <p:txBody>
+          <a:bodyPr/>
+          <a:lstStyle/>
+          <a:p>
+            <a:endParaRPr lang="en-GB"/>
+          </a:p>
+        </p:txBody>
+      </p:sp>
+      <p:sp>
+        <p:nvSpPr>
+          <p:cNvPr id="5" name="Text 3"/>
           <p:cNvSpPr/>
           <p:nvPr/>
         </p:nvSpPr>
@@ -2390,31 +2307,6 @@
           <a:prstGeom prst="rect">
             <a:avLst/>
           </a:prstGeom>
-          <a:solidFill>
-            <a:srgbClr val="E8F0E0"/>
-          </a:solidFill>
-          <a:ln w="19050">
-            <a:solidFill>
-              <a:srgbClr val="4A7C59"/>
-            </a:solidFill>
-            <a:prstDash val="dashDot"/>
-          </a:ln>
-        </p:spPr>
-      </p:sp>
-      <p:sp>
-        <p:nvSpPr>
-          <p:cNvPr id="5" name="Text 3"/>
-          <p:cNvSpPr/>
-          <p:nvPr/>
-        </p:nvSpPr>
-        <p:spPr>
-          <a:xfrm>
-            <a:off x="320040" y="987552"/>
-            <a:ext cx="4846320" cy="2560320"/>
-          </a:xfrm>
-          <a:prstGeom prst="rect">
-            <a:avLst/>
-          </a:prstGeom>
           <a:noFill/>
           <a:ln/>
         </p:spPr>
@@ -2422,7 +2314,7 @@
           <a:bodyPr wrap="square" rtlCol="0" anchor="ctr"/>
           <a:lstStyle/>
           <a:p>
-            <a:pPr algn="ctr" indent="0" marL="0">
+            <a:pPr marL="0" indent="0" algn="ctr">
               <a:buNone/>
             </a:pPr>
             <a:r>
@@ -2439,7 +2331,7 @@
             <a:endParaRPr lang="en-US" sz="1100" dirty="0"/>
           </a:p>
           <a:p>
-            <a:pPr algn="ctr" indent="0" marL="0">
+            <a:pPr marL="0" indent="0" algn="ctr">
               <a:buNone/>
             </a:pPr>
             <a:r>
@@ -2456,7 +2348,7 @@
             <a:endParaRPr lang="en-US" sz="1100" dirty="0"/>
           </a:p>
           <a:p>
-            <a:pPr algn="ctr" indent="0" marL="0">
+            <a:pPr marL="0" indent="0" algn="ctr">
               <a:buNone/>
             </a:pPr>
             <a:r>
@@ -2482,8 +2374,8 @@
         </p:nvSpPr>
         <p:spPr>
           <a:xfrm>
-            <a:off x="5394960" y="987552"/>
-            <a:ext cx="3429000" cy="2560320"/>
+            <a:off x="4572000" y="987552"/>
+            <a:ext cx="4251960" cy="2560320"/>
           </a:xfrm>
           <a:prstGeom prst="rect">
             <a:avLst/>
@@ -2498,13 +2390,20 @@
             <a:prstDash val="solid"/>
           </a:ln>
           <a:effectLst>
-            <a:outerShdw sx="100000" sy="100000" kx="0" ky="0" algn="bl" rotWithShape="0" blurRad="63500" dist="25400" dir="8100000">
+            <a:outerShdw blurRad="63500" dist="25400" dir="8100000" algn="bl" rotWithShape="0">
               <a:srgbClr val="000000">
                 <a:alpha val="10000"/>
               </a:srgbClr>
             </a:outerShdw>
           </a:effectLst>
         </p:spPr>
+        <p:txBody>
+          <a:bodyPr/>
+          <a:lstStyle/>
+          <a:p>
+            <a:endParaRPr lang="en-GB"/>
+          </a:p>
+        </p:txBody>
       </p:sp>
       <p:sp>
         <p:nvSpPr>
@@ -2514,7 +2413,7 @@
         </p:nvSpPr>
         <p:spPr>
           <a:xfrm>
-            <a:off x="5394960" y="987552"/>
+            <a:off x="4592187" y="987552"/>
             <a:ext cx="64008" cy="2560320"/>
           </a:xfrm>
           <a:prstGeom prst="rect">
@@ -2530,6 +2429,13 @@
             <a:prstDash val="solid"/>
           </a:ln>
         </p:spPr>
+        <p:txBody>
+          <a:bodyPr/>
+          <a:lstStyle/>
+          <a:p>
+            <a:endParaRPr lang="en-GB"/>
+          </a:p>
+        </p:txBody>
       </p:sp>
       <p:sp>
         <p:nvSpPr>
@@ -2539,7 +2445,7 @@
         </p:nvSpPr>
         <p:spPr>
           <a:xfrm>
-            <a:off x="5577840" y="1060704"/>
+            <a:off x="4829931" y="1060704"/>
             <a:ext cx="3154680" cy="274320"/>
           </a:xfrm>
           <a:prstGeom prst="rect">
@@ -2552,7 +2458,7 @@
           <a:bodyPr wrap="square" lIns="0" tIns="0" rIns="0" bIns="0" rtlCol="0" anchor="ctr"/>
           <a:lstStyle/>
           <a:p>
-            <a:pPr indent="0" marL="0">
+            <a:pPr marL="0" indent="0">
               <a:buNone/>
             </a:pPr>
             <a:r>
@@ -2578,7 +2484,7 @@
         </p:nvSpPr>
         <p:spPr>
           <a:xfrm>
-            <a:off x="5577840" y="1371600"/>
+            <a:off x="4829931" y="1371600"/>
             <a:ext cx="3154680" cy="2011680"/>
           </a:xfrm>
           <a:prstGeom prst="rect">
@@ -2628,20 +2534,10 @@
                 <a:ea typeface="Calibri" pitchFamily="34" charset="-122"/>
                 <a:cs typeface="Calibri" pitchFamily="34" charset="-120"/>
               </a:rPr>
-              <a:t>Фильтрация по ингредиентам</a:t>
-            </a:r>
-            <a:endParaRPr lang="en-US" sz="1150" dirty="0"/>
-          </a:p>
-          <a:p>
-            <a:pPr marL="342900" indent="-342900">
-              <a:spcAft>
-                <a:spcPts val="600"/>
-              </a:spcAft>
-              <a:buSzPct val="100000"/>
-              <a:buChar char="•"/>
-            </a:pPr>
-            <a:r>
-              <a:rPr lang="en-US" sz="1150" dirty="0">
+              <a:t>Фильтрация </a:t>
+            </a:r>
+            <a:r>
+              <a:rPr lang="en-US" sz="1150" dirty="0" err="1">
                 <a:solidFill>
                   <a:srgbClr val="1E2D1E"/>
                 </a:solidFill>
@@ -2649,7 +2545,29 @@
                 <a:ea typeface="Calibri" pitchFamily="34" charset="-122"/>
                 <a:cs typeface="Calibri" pitchFamily="34" charset="-120"/>
               </a:rPr>
-              <a:t>Виджет filter_horizontal для M2M-поля</a:t>
+              <a:t>по</a:t>
+            </a:r>
+            <a:r>
+              <a:rPr lang="en-US" sz="1150" dirty="0">
+                <a:solidFill>
+                  <a:srgbClr val="1E2D1E"/>
+                </a:solidFill>
+                <a:latin typeface="Calibri" pitchFamily="34" charset="0"/>
+                <a:ea typeface="Calibri" pitchFamily="34" charset="-122"/>
+                <a:cs typeface="Calibri" pitchFamily="34" charset="-120"/>
+              </a:rPr>
+              <a:t> </a:t>
+            </a:r>
+            <a:r>
+              <a:rPr lang="en-US" sz="1150" dirty="0" err="1">
+                <a:solidFill>
+                  <a:srgbClr val="1E2D1E"/>
+                </a:solidFill>
+                <a:latin typeface="Calibri" pitchFamily="34" charset="0"/>
+                <a:ea typeface="Calibri" pitchFamily="34" charset="-122"/>
+                <a:cs typeface="Calibri" pitchFamily="34" charset="-120"/>
+              </a:rPr>
+              <a:t>ингредиентам</a:t>
             </a:r>
             <a:endParaRPr lang="en-US" sz="1150" dirty="0"/>
           </a:p>
@@ -2721,13 +2639,20 @@
             <a:prstDash val="solid"/>
           </a:ln>
           <a:effectLst>
-            <a:outerShdw sx="100000" sy="100000" kx="0" ky="0" algn="bl" rotWithShape="0" blurRad="63500" dist="25400" dir="8100000">
+            <a:outerShdw blurRad="63500" dist="25400" dir="8100000" algn="bl" rotWithShape="0">
               <a:srgbClr val="000000">
                 <a:alpha val="10000"/>
               </a:srgbClr>
             </a:outerShdw>
           </a:effectLst>
         </p:spPr>
+        <p:txBody>
+          <a:bodyPr/>
+          <a:lstStyle/>
+          <a:p>
+            <a:endParaRPr lang="en-GB"/>
+          </a:p>
+        </p:txBody>
       </p:sp>
       <p:sp>
         <p:nvSpPr>
@@ -2750,7 +2675,7 @@
           <a:bodyPr wrap="square" lIns="0" tIns="0" rIns="0" bIns="0" rtlCol="0" anchor="ctr"/>
           <a:lstStyle/>
           <a:p>
-            <a:pPr indent="0" marL="0">
+            <a:pPr marL="0" indent="0">
               <a:buNone/>
             </a:pPr>
             <a:r>
@@ -2789,7 +2714,7 @@
           <a:bodyPr wrap="square" rtlCol="0" anchor="ctr"/>
           <a:lstStyle/>
           <a:p>
-            <a:pPr indent="0" marL="0">
+            <a:pPr marL="0" indent="0">
               <a:buNone/>
             </a:pPr>
             <a:r>
@@ -2828,7 +2753,7 @@
           <a:bodyPr wrap="square" rtlCol="0" anchor="ctr"/>
           <a:lstStyle/>
           <a:p>
-            <a:pPr indent="0" marL="0">
+            <a:pPr marL="0" indent="0">
               <a:buNone/>
             </a:pPr>
             <a:r>
@@ -2845,7 +2770,7 @@
             <a:endParaRPr lang="en-US" sz="1050" dirty="0"/>
           </a:p>
           <a:p>
-            <a:pPr indent="0" marL="0">
+            <a:pPr marL="0" indent="0">
               <a:buNone/>
             </a:pPr>
             <a:r>
@@ -2884,7 +2809,7 @@
           <a:bodyPr wrap="square" rtlCol="0" anchor="ctr"/>
           <a:lstStyle/>
           <a:p>
-            <a:pPr indent="0" marL="0">
+            <a:pPr marL="0" indent="0">
               <a:buNone/>
             </a:pPr>
             <a:r>
@@ -2896,7 +2821,7 @@
                 <a:ea typeface="Consolas" pitchFamily="34" charset="-122"/>
                 <a:cs typeface="Consolas" pitchFamily="34" charset="-120"/>
               </a:rPr>
-              <a:t>/results/</a:t>
+              <a:t>/recipes/</a:t>
             </a:r>
             <a:endParaRPr lang="en-US" sz="1100" dirty="0"/>
           </a:p>
@@ -2923,7 +2848,7 @@
           <a:bodyPr wrap="square" rtlCol="0" anchor="ctr"/>
           <a:lstStyle/>
           <a:p>
-            <a:pPr indent="0" marL="0">
+            <a:pPr marL="0" indent="0">
               <a:buNone/>
             </a:pPr>
             <a:r>
@@ -2935,16 +2860,16 @@
                 <a:ea typeface="Calibri" pitchFamily="34" charset="-122"/>
                 <a:cs typeface="Calibri" pitchFamily="34" charset="-120"/>
               </a:rPr>
-              <a:t>results()</a:t>
+              <a:t>recipes()</a:t>
             </a:r>
             <a:endParaRPr lang="en-US" sz="1050" dirty="0"/>
           </a:p>
           <a:p>
-            <a:pPr indent="0" marL="0">
+            <a:pPr marL="0" indent="0">
               <a:buNone/>
             </a:pPr>
             <a:r>
-              <a:rPr lang="en-US" sz="1050" dirty="0">
+              <a:rPr lang="ru-RU" sz="1050" dirty="0">
                 <a:solidFill>
                   <a:srgbClr val="1E2D1E"/>
                 </a:solidFill>
@@ -2952,7 +2877,7 @@
                 <a:ea typeface="Calibri" pitchFamily="34" charset="-122"/>
                 <a:cs typeface="Calibri" pitchFamily="34" charset="-120"/>
               </a:rPr>
-              <a:t>алгоритм поиска и ранжирования</a:t>
+              <a:t>страница рецепта</a:t>
             </a:r>
             <a:endParaRPr lang="en-US" sz="1050" dirty="0"/>
           </a:p>
@@ -2979,7 +2904,7 @@
           <a:bodyPr wrap="square" rtlCol="0" anchor="ctr"/>
           <a:lstStyle/>
           <a:p>
-            <a:pPr indent="0" marL="0">
+            <a:pPr marL="0" indent="0">
               <a:buNone/>
             </a:pPr>
             <a:r>
@@ -3018,7 +2943,7 @@
           <a:bodyPr wrap="square" rtlCol="0" anchor="ctr"/>
           <a:lstStyle/>
           <a:p>
-            <a:pPr indent="0" marL="0">
+            <a:pPr marL="0" indent="0">
               <a:buNone/>
             </a:pPr>
             <a:r>
@@ -3035,7 +2960,7 @@
             <a:endParaRPr lang="en-US" sz="1050" dirty="0"/>
           </a:p>
           <a:p>
-            <a:pPr indent="0" marL="0">
+            <a:pPr marL="0" indent="0">
               <a:buNone/>
             </a:pPr>
             <a:r>
@@ -3053,6 +2978,37 @@
           </a:p>
         </p:txBody>
       </p:sp>
+      <p:pic>
+        <p:nvPicPr>
+          <p:cNvPr id="19" name="Рисунок 18">
+            <a:extLst>
+              <a:ext uri="{FF2B5EF4-FFF2-40B4-BE49-F238E27FC236}">
+                <a16:creationId xmlns:a16="http://schemas.microsoft.com/office/drawing/2014/main" id="{5096C42C-44A0-A55C-5CFA-F5EA6A62DEBA}"/>
+              </a:ext>
+            </a:extLst>
+          </p:cNvPr>
+          <p:cNvPicPr>
+            <a:picLocks noChangeAspect="1"/>
+          </p:cNvPicPr>
+          <p:nvPr/>
+        </p:nvPicPr>
+        <p:blipFill>
+          <a:blip r:embed="rId3"/>
+          <a:srcRect l="1" t="13300" r="2400" b="-13300"/>
+          <a:stretch>
+            <a:fillRect/>
+          </a:stretch>
+        </p:blipFill>
+        <p:spPr>
+          <a:xfrm>
+            <a:off x="319691" y="987552"/>
+            <a:ext cx="3762331" cy="2969851"/>
+          </a:xfrm>
+          <a:prstGeom prst="rect">
+            <a:avLst/>
+          </a:prstGeom>
+        </p:spPr>
+      </p:pic>
     </p:spTree>
   </p:cSld>
   <p:clrMapOvr>
@@ -3069,6 +3025,7 @@
         <a:solidFill>
           <a:srgbClr val="EDF4E8"/>
         </a:solidFill>
+        <a:effectLst/>
       </p:bgPr>
     </p:bg>
     <p:spTree>
@@ -3106,7 +3063,7 @@
           <a:bodyPr wrap="square" lIns="0" tIns="0" rIns="0" bIns="0" rtlCol="0" anchor="ctr"/>
           <a:lstStyle/>
           <a:p>
-            <a:pPr algn="l" indent="0" marL="0">
+            <a:pPr marL="0" indent="0" algn="l">
               <a:buNone/>
             </a:pPr>
             <a:r>
@@ -3148,6 +3105,13 @@
             <a:prstDash val="solid"/>
           </a:ln>
         </p:spPr>
+        <p:txBody>
+          <a:bodyPr/>
+          <a:lstStyle/>
+          <a:p>
+            <a:endParaRPr lang="en-GB"/>
+          </a:p>
+        </p:txBody>
       </p:sp>
       <p:sp>
         <p:nvSpPr>
@@ -3173,13 +3137,20 @@
             <a:prstDash val="solid"/>
           </a:ln>
           <a:effectLst>
-            <a:outerShdw sx="100000" sy="100000" kx="0" ky="0" algn="bl" rotWithShape="0" blurRad="63500" dist="25400" dir="8100000">
+            <a:outerShdw blurRad="63500" dist="25400" dir="8100000" algn="bl" rotWithShape="0">
               <a:srgbClr val="000000">
                 <a:alpha val="10000"/>
               </a:srgbClr>
             </a:outerShdw>
           </a:effectLst>
         </p:spPr>
+        <p:txBody>
+          <a:bodyPr/>
+          <a:lstStyle/>
+          <a:p>
+            <a:endParaRPr lang="en-GB"/>
+          </a:p>
+        </p:txBody>
       </p:sp>
       <p:sp>
         <p:nvSpPr>
@@ -3202,63 +3173,62 @@
           <a:bodyPr wrap="square" rtlCol="0" anchor="ctr"/>
           <a:lstStyle/>
           <a:p>
-            <a:pPr algn="ctr" indent="0" marL="0">
+            <a:pPr marL="0" indent="0" algn="ctr">
               <a:buNone/>
             </a:pPr>
             <a:r>
               <a:rPr lang="en-US" sz="3000" b="1" dirty="0">
                 <a:solidFill>
                   <a:srgbClr val="4A7C59"/>
+                </a:solidFill>
+                <a:latin typeface="Calibri" pitchFamily="34" charset="0"/>
+                <a:cs typeface="Calibri" pitchFamily="34" charset="-120"/>
+              </a:rPr>
+              <a:t>46</a:t>
+            </a:r>
+            <a:endParaRPr lang="en-US" sz="3000" dirty="0"/>
+          </a:p>
+        </p:txBody>
+      </p:sp>
+      <p:sp>
+        <p:nvSpPr>
+          <p:cNvPr id="6" name="Text 4"/>
+          <p:cNvSpPr/>
+          <p:nvPr/>
+        </p:nvSpPr>
+        <p:spPr>
+          <a:xfrm>
+            <a:off x="365760" y="1481328"/>
+            <a:ext cx="1920240" cy="329184"/>
+          </a:xfrm>
+          <a:prstGeom prst="rect">
+            <a:avLst/>
+          </a:prstGeom>
+          <a:noFill/>
+          <a:ln/>
+        </p:spPr>
+        <p:txBody>
+          <a:bodyPr wrap="square" rtlCol="0" anchor="ctr"/>
+          <a:lstStyle/>
+          <a:p>
+            <a:pPr marL="0" indent="0" algn="ctr">
+              <a:buNone/>
+            </a:pPr>
+            <a:r>
+              <a:rPr lang="en-US" sz="1000" dirty="0">
+                <a:solidFill>
+                  <a:srgbClr val="5A6E5A"/>
                 </a:solidFill>
                 <a:latin typeface="Calibri" pitchFamily="34" charset="0"/>
                 <a:ea typeface="Calibri" pitchFamily="34" charset="-122"/>
                 <a:cs typeface="Calibri" pitchFamily="34" charset="-120"/>
               </a:rPr>
-              <a:t>50</a:t>
-            </a:r>
-            <a:endParaRPr lang="en-US" sz="3000" dirty="0"/>
-          </a:p>
-        </p:txBody>
-      </p:sp>
-      <p:sp>
-        <p:nvSpPr>
-          <p:cNvPr id="6" name="Text 4"/>
-          <p:cNvSpPr/>
-          <p:nvPr/>
-        </p:nvSpPr>
-        <p:spPr>
-          <a:xfrm>
-            <a:off x="365760" y="1481328"/>
-            <a:ext cx="1920240" cy="329184"/>
-          </a:xfrm>
-          <a:prstGeom prst="rect">
-            <a:avLst/>
-          </a:prstGeom>
-          <a:noFill/>
-          <a:ln/>
-        </p:spPr>
-        <p:txBody>
-          <a:bodyPr wrap="square" rtlCol="0" anchor="ctr"/>
-          <a:lstStyle/>
-          <a:p>
-            <a:pPr algn="ctr" indent="0" marL="0">
-              <a:buNone/>
-            </a:pPr>
-            <a:r>
-              <a:rPr lang="en-US" sz="1000" dirty="0">
-                <a:solidFill>
-                  <a:srgbClr val="5A6E5A"/>
-                </a:solidFill>
-                <a:latin typeface="Calibri" pitchFamily="34" charset="0"/>
-                <a:ea typeface="Calibri" pitchFamily="34" charset="-122"/>
-                <a:cs typeface="Calibri" pitchFamily="34" charset="-120"/>
-              </a:rPr>
               <a:t>ингредиентов</a:t>
             </a:r>
             <a:endParaRPr lang="en-US" sz="1000" dirty="0"/>
           </a:p>
           <a:p>
-            <a:pPr algn="ctr" indent="0" marL="0">
+            <a:pPr marL="0" indent="0" algn="ctr">
               <a:buNone/>
             </a:pPr>
             <a:r>
@@ -3300,13 +3270,20 @@
             <a:prstDash val="solid"/>
           </a:ln>
           <a:effectLst>
-            <a:outerShdw sx="100000" sy="100000" kx="0" ky="0" algn="bl" rotWithShape="0" blurRad="63500" dist="25400" dir="8100000">
+            <a:outerShdw blurRad="63500" dist="25400" dir="8100000" algn="bl" rotWithShape="0">
               <a:srgbClr val="000000">
                 <a:alpha val="10000"/>
               </a:srgbClr>
             </a:outerShdw>
           </a:effectLst>
         </p:spPr>
+        <p:txBody>
+          <a:bodyPr/>
+          <a:lstStyle/>
+          <a:p>
+            <a:endParaRPr lang="en-GB"/>
+          </a:p>
+        </p:txBody>
       </p:sp>
       <p:sp>
         <p:nvSpPr>
@@ -3329,7 +3306,7 @@
           <a:bodyPr wrap="square" rtlCol="0" anchor="ctr"/>
           <a:lstStyle/>
           <a:p>
-            <a:pPr algn="ctr" indent="0" marL="0">
+            <a:pPr marL="0" indent="0" algn="ctr">
               <a:buNone/>
             </a:pPr>
             <a:r>
@@ -3341,7 +3318,7 @@
                 <a:ea typeface="Calibri" pitchFamily="34" charset="-122"/>
                 <a:cs typeface="Calibri" pitchFamily="34" charset="-120"/>
               </a:rPr>
-              <a:t>15</a:t>
+              <a:t>10</a:t>
             </a:r>
             <a:endParaRPr lang="en-US" sz="3000" dirty="0"/>
           </a:p>
@@ -3368,7 +3345,7 @@
           <a:bodyPr wrap="square" rtlCol="0" anchor="ctr"/>
           <a:lstStyle/>
           <a:p>
-            <a:pPr algn="ctr" indent="0" marL="0">
+            <a:pPr marL="0" indent="0" algn="ctr">
               <a:buNone/>
             </a:pPr>
             <a:r>
@@ -3385,7 +3362,7 @@
             <a:endParaRPr lang="en-US" sz="1000" dirty="0"/>
           </a:p>
           <a:p>
-            <a:pPr algn="ctr" indent="0" marL="0">
+            <a:pPr marL="0" indent="0" algn="ctr">
               <a:buNone/>
             </a:pPr>
             <a:r>
@@ -3427,13 +3404,20 @@
             <a:prstDash val="solid"/>
           </a:ln>
           <a:effectLst>
-            <a:outerShdw sx="100000" sy="100000" kx="0" ky="0" algn="bl" rotWithShape="0" blurRad="63500" dist="25400" dir="8100000">
+            <a:outerShdw blurRad="63500" dist="25400" dir="8100000" algn="bl" rotWithShape="0">
               <a:srgbClr val="000000">
                 <a:alpha val="10000"/>
               </a:srgbClr>
             </a:outerShdw>
           </a:effectLst>
         </p:spPr>
+        <p:txBody>
+          <a:bodyPr/>
+          <a:lstStyle/>
+          <a:p>
+            <a:endParaRPr lang="en-GB"/>
+          </a:p>
+        </p:txBody>
       </p:sp>
       <p:sp>
         <p:nvSpPr>
@@ -3456,7 +3440,7 @@
           <a:bodyPr wrap="square" rtlCol="0" anchor="ctr"/>
           <a:lstStyle/>
           <a:p>
-            <a:pPr algn="ctr" indent="0" marL="0">
+            <a:pPr marL="0" indent="0" algn="ctr">
               <a:buNone/>
             </a:pPr>
             <a:r>
@@ -3495,7 +3479,7 @@
           <a:bodyPr wrap="square" rtlCol="0" anchor="ctr"/>
           <a:lstStyle/>
           <a:p>
-            <a:pPr algn="ctr" indent="0" marL="0">
+            <a:pPr marL="0" indent="0" algn="ctr">
               <a:buNone/>
             </a:pPr>
             <a:r>
@@ -3512,7 +3496,7 @@
             <a:endParaRPr lang="en-US" sz="1000" dirty="0"/>
           </a:p>
           <a:p>
-            <a:pPr algn="ctr" indent="0" marL="0">
+            <a:pPr marL="0" indent="0" algn="ctr">
               <a:buNone/>
             </a:pPr>
             <a:r>
@@ -3554,13 +3538,20 @@
             <a:prstDash val="solid"/>
           </a:ln>
           <a:effectLst>
-            <a:outerShdw sx="100000" sy="100000" kx="0" ky="0" algn="bl" rotWithShape="0" blurRad="63500" dist="25400" dir="8100000">
+            <a:outerShdw blurRad="63500" dist="25400" dir="8100000" algn="bl" rotWithShape="0">
               <a:srgbClr val="000000">
                 <a:alpha val="10000"/>
               </a:srgbClr>
             </a:outerShdw>
           </a:effectLst>
         </p:spPr>
+        <p:txBody>
+          <a:bodyPr/>
+          <a:lstStyle/>
+          <a:p>
+            <a:endParaRPr lang="en-GB"/>
+          </a:p>
+        </p:txBody>
       </p:sp>
       <p:sp>
         <p:nvSpPr>
@@ -3583,7 +3574,7 @@
           <a:bodyPr wrap="square" rtlCol="0" anchor="ctr"/>
           <a:lstStyle/>
           <a:p>
-            <a:pPr algn="ctr" indent="0" marL="0">
+            <a:pPr marL="0" indent="0" algn="ctr">
               <a:buNone/>
             </a:pPr>
             <a:r>
@@ -3622,7 +3613,7 @@
           <a:bodyPr wrap="square" rtlCol="0" anchor="ctr"/>
           <a:lstStyle/>
           <a:p>
-            <a:pPr algn="ctr" indent="0" marL="0">
+            <a:pPr marL="0" indent="0" algn="ctr">
               <a:buNone/>
             </a:pPr>
             <a:r>
@@ -3639,7 +3630,7 @@
             <a:endParaRPr lang="en-US" sz="1000" dirty="0"/>
           </a:p>
           <a:p>
-            <a:pPr algn="ctr" indent="0" marL="0">
+            <a:pPr marL="0" indent="0" algn="ctr">
               <a:buNone/>
             </a:pPr>
             <a:r>
@@ -3659,7 +3650,7 @@
       </p:sp>
       <p:graphicFrame>
         <p:nvGraphicFramePr>
-          <p:cNvPr id="12" name="Table 0"/>
+          <p:cNvPr id="16" name="Table 0"/>
           <p:cNvGraphicFramePr>
             <a:graphicFrameLocks noGrp="1"/>
           </p:cNvGraphicFramePr>
@@ -3673,17 +3664,41 @@
         </p:nvGraphicFramePr>
         <p:xfrm>
           <a:off x="320040" y="1993392"/>
-          <a:ext cx="8503920" cy="914400"/>
+          <a:ext cx="7452360" cy="2633472"/>
         </p:xfrm>
         <a:graphic>
           <a:graphicData uri="http://schemas.openxmlformats.org/drawingml/2006/table">
             <a:tbl>
               <a:tblPr/>
               <a:tblGrid>
-                <a:gridCol w="411480"/>
-                <a:gridCol w="2743200"/>
-                <a:gridCol w="3017520"/>
-                <a:gridCol w="1280160"/>
+                <a:gridCol w="411480">
+                  <a:extLst>
+                    <a:ext uri="{9D8B030D-6E8A-4147-A177-3AD203B41FA5}">
+                      <a16:colId xmlns:a16="http://schemas.microsoft.com/office/drawing/2014/main" val="20000"/>
+                    </a:ext>
+                  </a:extLst>
+                </a:gridCol>
+                <a:gridCol w="2743200">
+                  <a:extLst>
+                    <a:ext uri="{9D8B030D-6E8A-4147-A177-3AD203B41FA5}">
+                      <a16:colId xmlns:a16="http://schemas.microsoft.com/office/drawing/2014/main" val="20001"/>
+                    </a:ext>
+                  </a:extLst>
+                </a:gridCol>
+                <a:gridCol w="3017520">
+                  <a:extLst>
+                    <a:ext uri="{9D8B030D-6E8A-4147-A177-3AD203B41FA5}">
+                      <a16:colId xmlns:a16="http://schemas.microsoft.com/office/drawing/2014/main" val="20002"/>
+                    </a:ext>
+                  </a:extLst>
+                </a:gridCol>
+                <a:gridCol w="1280160">
+                  <a:extLst>
+                    <a:ext uri="{9D8B030D-6E8A-4147-A177-3AD203B41FA5}">
+                      <a16:colId xmlns:a16="http://schemas.microsoft.com/office/drawing/2014/main" val="20003"/>
+                    </a:ext>
+                  </a:extLst>
+                </a:gridCol>
               </a:tblGrid>
               <a:tr h="438912">
                 <a:tc>
@@ -3691,7 +3706,7 @@
                     <a:bodyPr/>
                     <a:lstStyle/>
                     <a:p>
-                      <a:pPr algn="ctr" indent="0" marL="0">
+                      <a:pPr marL="0" indent="0" algn="ctr">
                         <a:buNone/>
                       </a:pPr>
                       <a:r>
@@ -3759,7 +3774,7 @@
                     <a:bodyPr/>
                     <a:lstStyle/>
                     <a:p>
-                      <a:pPr algn="l" indent="0" marL="0">
+                      <a:pPr marL="0" indent="0" algn="l">
                         <a:buNone/>
                       </a:pPr>
                       <a:r>
@@ -3827,7 +3842,7 @@
                     <a:bodyPr/>
                     <a:lstStyle/>
                     <a:p>
-                      <a:pPr algn="l" indent="0" marL="0">
+                      <a:pPr marL="0" indent="0" algn="l">
                         <a:buNone/>
                       </a:pPr>
                       <a:r>
@@ -3895,7 +3910,7 @@
                     <a:bodyPr/>
                     <a:lstStyle/>
                     <a:p>
-                      <a:pPr algn="ctr" indent="0" marL="0">
+                      <a:pPr marL="0" indent="0" algn="ctr">
                         <a:buNone/>
                       </a:pPr>
                       <a:r>
@@ -3958,6 +3973,11 @@
                     </a:solidFill>
                   </a:tcPr>
                 </a:tc>
+                <a:extLst>
+                  <a:ext uri="{0D108BD9-81ED-4DB2-BD59-A6C34878D82A}">
+                    <a16:rowId xmlns:a16="http://schemas.microsoft.com/office/drawing/2014/main" val="10000"/>
+                  </a:ext>
+                </a:extLst>
               </a:tr>
               <a:tr h="438912">
                 <a:tc>
@@ -3965,7 +3985,7 @@
                     <a:bodyPr/>
                     <a:lstStyle/>
                     <a:p>
-                      <a:pPr algn="ctr" indent="0" marL="0">
+                      <a:pPr marL="0" indent="0" algn="ctr">
                         <a:buNone/>
                       </a:pPr>
                       <a:r>
@@ -4033,7 +4053,7 @@
                     <a:bodyPr/>
                     <a:lstStyle/>
                     <a:p>
-                      <a:pPr algn="l" indent="0" marL="0">
+                      <a:pPr marL="0" indent="0" algn="l">
                         <a:buNone/>
                       </a:pPr>
                       <a:r>
@@ -4101,7 +4121,7 @@
                     <a:bodyPr/>
                     <a:lstStyle/>
                     <a:p>
-                      <a:pPr algn="l" indent="0" marL="0">
+                      <a:pPr marL="0" indent="0" algn="l">
                         <a:buNone/>
                       </a:pPr>
                       <a:r>
@@ -4169,7 +4189,7 @@
                     <a:bodyPr/>
                     <a:lstStyle/>
                     <a:p>
-                      <a:pPr algn="ctr" indent="0" marL="0">
+                      <a:pPr marL="0" indent="0" algn="ctr">
                         <a:buNone/>
                       </a:pPr>
                       <a:r>
@@ -4232,6 +4252,11 @@
                     </a:solidFill>
                   </a:tcPr>
                 </a:tc>
+                <a:extLst>
+                  <a:ext uri="{0D108BD9-81ED-4DB2-BD59-A6C34878D82A}">
+                    <a16:rowId xmlns:a16="http://schemas.microsoft.com/office/drawing/2014/main" val="10001"/>
+                  </a:ext>
+                </a:extLst>
               </a:tr>
               <a:tr h="438912">
                 <a:tc>
@@ -4239,7 +4264,7 @@
                     <a:bodyPr/>
                     <a:lstStyle/>
                     <a:p>
-                      <a:pPr algn="ctr" indent="0" marL="0">
+                      <a:pPr marL="0" indent="0" algn="ctr">
                         <a:buNone/>
                       </a:pPr>
                       <a:r>
@@ -4307,7 +4332,7 @@
                     <a:bodyPr/>
                     <a:lstStyle/>
                     <a:p>
-                      <a:pPr algn="l" indent="0" marL="0">
+                      <a:pPr marL="0" indent="0" algn="l">
                         <a:buNone/>
                       </a:pPr>
                       <a:r>
@@ -4375,7 +4400,7 @@
                     <a:bodyPr/>
                     <a:lstStyle/>
                     <a:p>
-                      <a:pPr algn="l" indent="0" marL="0">
+                      <a:pPr marL="0" indent="0" algn="l">
                         <a:buNone/>
                       </a:pPr>
                       <a:r>
@@ -4443,7 +4468,7 @@
                     <a:bodyPr/>
                     <a:lstStyle/>
                     <a:p>
-                      <a:pPr algn="ctr" indent="0" marL="0">
+                      <a:pPr marL="0" indent="0" algn="ctr">
                         <a:buNone/>
                       </a:pPr>
                       <a:r>
@@ -4506,6 +4531,11 @@
                     </a:solidFill>
                   </a:tcPr>
                 </a:tc>
+                <a:extLst>
+                  <a:ext uri="{0D108BD9-81ED-4DB2-BD59-A6C34878D82A}">
+                    <a16:rowId xmlns:a16="http://schemas.microsoft.com/office/drawing/2014/main" val="10002"/>
+                  </a:ext>
+                </a:extLst>
               </a:tr>
               <a:tr h="438912">
                 <a:tc>
@@ -4513,7 +4543,7 @@
                     <a:bodyPr/>
                     <a:lstStyle/>
                     <a:p>
-                      <a:pPr algn="ctr" indent="0" marL="0">
+                      <a:pPr marL="0" indent="0" algn="ctr">
                         <a:buNone/>
                       </a:pPr>
                       <a:r>
@@ -4581,7 +4611,7 @@
                     <a:bodyPr/>
                     <a:lstStyle/>
                     <a:p>
-                      <a:pPr algn="l" indent="0" marL="0">
+                      <a:pPr marL="0" indent="0" algn="l">
                         <a:buNone/>
                       </a:pPr>
                       <a:r>
@@ -4649,7 +4679,7 @@
                     <a:bodyPr/>
                     <a:lstStyle/>
                     <a:p>
-                      <a:pPr algn="l" indent="0" marL="0">
+                      <a:pPr marL="0" indent="0" algn="l">
                         <a:buNone/>
                       </a:pPr>
                       <a:r>
@@ -4717,7 +4747,7 @@
                     <a:bodyPr/>
                     <a:lstStyle/>
                     <a:p>
-                      <a:pPr algn="ctr" indent="0" marL="0">
+                      <a:pPr marL="0" indent="0" algn="ctr">
                         <a:buNone/>
                       </a:pPr>
                       <a:r>
@@ -4780,6 +4810,11 @@
                     </a:solidFill>
                   </a:tcPr>
                 </a:tc>
+                <a:extLst>
+                  <a:ext uri="{0D108BD9-81ED-4DB2-BD59-A6C34878D82A}">
+                    <a16:rowId xmlns:a16="http://schemas.microsoft.com/office/drawing/2014/main" val="10003"/>
+                  </a:ext>
+                </a:extLst>
               </a:tr>
               <a:tr h="438912">
                 <a:tc>
@@ -4787,7 +4822,7 @@
                     <a:bodyPr/>
                     <a:lstStyle/>
                     <a:p>
-                      <a:pPr algn="ctr" indent="0" marL="0">
+                      <a:pPr marL="0" indent="0" algn="ctr">
                         <a:buNone/>
                       </a:pPr>
                       <a:r>
@@ -4855,7 +4890,7 @@
                     <a:bodyPr/>
                     <a:lstStyle/>
                     <a:p>
-                      <a:pPr algn="l" indent="0" marL="0">
+                      <a:pPr marL="0" indent="0" algn="l">
                         <a:buNone/>
                       </a:pPr>
                       <a:r>
@@ -4923,7 +4958,7 @@
                     <a:bodyPr/>
                     <a:lstStyle/>
                     <a:p>
-                      <a:pPr algn="l" indent="0" marL="0">
+                      <a:pPr marL="0" indent="0" algn="l">
                         <a:buNone/>
                       </a:pPr>
                       <a:r>
@@ -4991,7 +5026,7 @@
                     <a:bodyPr/>
                     <a:lstStyle/>
                     <a:p>
-                      <a:pPr algn="ctr" indent="0" marL="0">
+                      <a:pPr marL="0" indent="0" algn="ctr">
                         <a:buNone/>
                       </a:pPr>
                       <a:r>
@@ -5054,6 +5089,11 @@
                     </a:solidFill>
                   </a:tcPr>
                 </a:tc>
+                <a:extLst>
+                  <a:ext uri="{0D108BD9-81ED-4DB2-BD59-A6C34878D82A}">
+                    <a16:rowId xmlns:a16="http://schemas.microsoft.com/office/drawing/2014/main" val="10004"/>
+                  </a:ext>
+                </a:extLst>
               </a:tr>
               <a:tr h="438912">
                 <a:tc>
@@ -5061,7 +5101,7 @@
                     <a:bodyPr/>
                     <a:lstStyle/>
                     <a:p>
-                      <a:pPr algn="ctr" indent="0" marL="0">
+                      <a:pPr marL="0" indent="0" algn="ctr">
                         <a:buNone/>
                       </a:pPr>
                       <a:r>
@@ -5129,7 +5169,7 @@
                     <a:bodyPr/>
                     <a:lstStyle/>
                     <a:p>
-                      <a:pPr algn="l" indent="0" marL="0">
+                      <a:pPr marL="0" indent="0" algn="l">
                         <a:buNone/>
                       </a:pPr>
                       <a:r>
@@ -5197,7 +5237,7 @@
                     <a:bodyPr/>
                     <a:lstStyle/>
                     <a:p>
-                      <a:pPr algn="l" indent="0" marL="0">
+                      <a:pPr marL="0" indent="0" algn="l">
                         <a:buNone/>
                       </a:pPr>
                       <a:r>
@@ -5265,7 +5305,7 @@
                     <a:bodyPr/>
                     <a:lstStyle/>
                     <a:p>
-                      <a:pPr algn="ctr" indent="0" marL="0">
+                      <a:pPr marL="0" indent="0" algn="ctr">
                         <a:buNone/>
                       </a:pPr>
                       <a:r>
@@ -5328,6 +5368,11 @@
                     </a:solidFill>
                   </a:tcPr>
                 </a:tc>
+                <a:extLst>
+                  <a:ext uri="{0D108BD9-81ED-4DB2-BD59-A6C34878D82A}">
+                    <a16:rowId xmlns:a16="http://schemas.microsoft.com/office/drawing/2014/main" val="10005"/>
+                  </a:ext>
+                </a:extLst>
               </a:tr>
             </a:tbl>
           </a:graphicData>
@@ -5354,7 +5399,7 @@
           <a:bodyPr wrap="square" rtlCol="0" anchor="ctr"/>
           <a:lstStyle/>
           <a:p>
-            <a:pPr algn="ctr" indent="0" marL="0">
+            <a:pPr marL="0" indent="0" algn="ctr">
               <a:buNone/>
             </a:pPr>
             <a:r>
@@ -5388,6 +5433,7 @@
         <a:solidFill>
           <a:srgbClr val="1A3C2E"/>
         </a:solidFill>
+        <a:effectLst/>
       </p:bgPr>
     </p:bg>
     <p:spTree>
@@ -5428,6 +5474,13 @@
             <a:prstDash val="solid"/>
           </a:ln>
         </p:spPr>
+        <p:txBody>
+          <a:bodyPr/>
+          <a:lstStyle/>
+          <a:p>
+            <a:endParaRPr lang="en-GB"/>
+          </a:p>
+        </p:txBody>
       </p:sp>
       <p:sp>
         <p:nvSpPr>
@@ -5453,6 +5506,13 @@
             <a:prstDash val="solid"/>
           </a:ln>
         </p:spPr>
+        <p:txBody>
+          <a:bodyPr/>
+          <a:lstStyle/>
+          <a:p>
+            <a:endParaRPr lang="en-GB" dirty="0"/>
+          </a:p>
+        </p:txBody>
       </p:sp>
       <p:sp>
         <p:nvSpPr>
@@ -5475,7 +5535,7 @@
           <a:bodyPr wrap="square" rtlCol="0" anchor="ctr"/>
           <a:lstStyle/>
           <a:p>
-            <a:pPr algn="ctr" indent="0" marL="0">
+            <a:pPr marL="0" indent="0" algn="ctr">
               <a:buNone/>
             </a:pPr>
             <a:r>
@@ -5487,7 +5547,7 @@
                 <a:ea typeface="Calibri" pitchFamily="34" charset="-122"/>
                 <a:cs typeface="Calibri" pitchFamily="34" charset="-120"/>
               </a:rPr>
-              <a:t>50</a:t>
+              <a:t>46</a:t>
             </a:r>
             <a:endParaRPr lang="en-US" sz="3200" dirty="0"/>
           </a:p>
@@ -5514,7 +5574,7 @@
           <a:bodyPr wrap="square" rtlCol="0" anchor="ctr"/>
           <a:lstStyle/>
           <a:p>
-            <a:pPr algn="ctr" indent="0" marL="0">
+            <a:pPr marL="0" indent="0" algn="ctr">
               <a:buNone/>
             </a:pPr>
             <a:r>
@@ -5553,7 +5613,7 @@
           <a:bodyPr wrap="square" rtlCol="0" anchor="ctr"/>
           <a:lstStyle/>
           <a:p>
-            <a:pPr algn="ctr" indent="0" marL="0">
+            <a:pPr marL="0" indent="0" algn="ctr">
               <a:buNone/>
             </a:pPr>
             <a:r>
@@ -5565,7 +5625,7 @@
                 <a:ea typeface="Calibri" pitchFamily="34" charset="-122"/>
                 <a:cs typeface="Calibri" pitchFamily="34" charset="-120"/>
               </a:rPr>
-              <a:t>15</a:t>
+              <a:t>10</a:t>
             </a:r>
             <a:endParaRPr lang="en-US" sz="3200" dirty="0"/>
           </a:p>
@@ -5592,7 +5652,7 @@
           <a:bodyPr wrap="square" rtlCol="0" anchor="ctr"/>
           <a:lstStyle/>
           <a:p>
-            <a:pPr algn="ctr" indent="0" marL="0">
+            <a:pPr marL="0" indent="0" algn="ctr">
               <a:buNone/>
             </a:pPr>
             <a:r>
@@ -5631,7 +5691,7 @@
           <a:bodyPr wrap="square" rtlCol="0" anchor="ctr"/>
           <a:lstStyle/>
           <a:p>
-            <a:pPr algn="ctr" indent="0" marL="0">
+            <a:pPr marL="0" indent="0" algn="ctr">
               <a:buNone/>
             </a:pPr>
             <a:r>
@@ -5670,7 +5730,7 @@
           <a:bodyPr wrap="square" rtlCol="0" anchor="ctr"/>
           <a:lstStyle/>
           <a:p>
-            <a:pPr algn="ctr" indent="0" marL="0">
+            <a:pPr marL="0" indent="0" algn="ctr">
               <a:buNone/>
             </a:pPr>
             <a:r>
@@ -5709,7 +5769,7 @@
           <a:bodyPr wrap="square" rtlCol="0" anchor="ctr"/>
           <a:lstStyle/>
           <a:p>
-            <a:pPr indent="0" marL="0">
+            <a:pPr marL="0" indent="0">
               <a:buNone/>
             </a:pPr>
             <a:r>
@@ -5748,7 +5808,7 @@
           <a:bodyPr wrap="square" lIns="0" tIns="0" rIns="0" bIns="0" rtlCol="0" anchor="ctr"/>
           <a:lstStyle/>
           <a:p>
-            <a:pPr indent="0" marL="0">
+            <a:pPr marL="0" indent="0">
               <a:buNone/>
             </a:pPr>
             <a:r>
@@ -5790,6 +5850,13 @@
             <a:prstDash val="solid"/>
           </a:ln>
         </p:spPr>
+        <p:txBody>
+          <a:bodyPr/>
+          <a:lstStyle/>
+          <a:p>
+            <a:endParaRPr lang="en-GB"/>
+          </a:p>
+        </p:txBody>
       </p:sp>
       <p:sp>
         <p:nvSpPr>
@@ -5812,7 +5879,7 @@
           <a:bodyPr wrap="square" rtlCol="0" anchor="ctr"/>
           <a:lstStyle/>
           <a:p>
-            <a:pPr indent="0" marL="0">
+            <a:pPr marL="0" indent="0">
               <a:buNone/>
             </a:pPr>
             <a:r>
@@ -5854,6 +5921,13 @@
             <a:prstDash val="solid"/>
           </a:ln>
         </p:spPr>
+        <p:txBody>
+          <a:bodyPr/>
+          <a:lstStyle/>
+          <a:p>
+            <a:endParaRPr lang="en-GB"/>
+          </a:p>
+        </p:txBody>
       </p:sp>
       <p:sp>
         <p:nvSpPr>
@@ -5876,7 +5950,7 @@
           <a:bodyPr wrap="square" rtlCol="0" anchor="ctr"/>
           <a:lstStyle/>
           <a:p>
-            <a:pPr indent="0" marL="0">
+            <a:pPr marL="0" indent="0">
               <a:buNone/>
             </a:pPr>
             <a:r>
@@ -5918,6 +5992,13 @@
             <a:prstDash val="solid"/>
           </a:ln>
         </p:spPr>
+        <p:txBody>
+          <a:bodyPr/>
+          <a:lstStyle/>
+          <a:p>
+            <a:endParaRPr lang="en-GB"/>
+          </a:p>
+        </p:txBody>
       </p:sp>
       <p:sp>
         <p:nvSpPr>
@@ -5940,7 +6021,7 @@
           <a:bodyPr wrap="square" rtlCol="0" anchor="ctr"/>
           <a:lstStyle/>
           <a:p>
-            <a:pPr indent="0" marL="0">
+            <a:pPr marL="0" indent="0">
               <a:buNone/>
             </a:pPr>
             <a:r>
@@ -5982,6 +6063,13 @@
             <a:prstDash val="solid"/>
           </a:ln>
         </p:spPr>
+        <p:txBody>
+          <a:bodyPr/>
+          <a:lstStyle/>
+          <a:p>
+            <a:endParaRPr lang="en-GB"/>
+          </a:p>
+        </p:txBody>
       </p:sp>
       <p:sp>
         <p:nvSpPr>
@@ -6004,7 +6092,7 @@
           <a:bodyPr wrap="square" rtlCol="0" anchor="ctr"/>
           <a:lstStyle/>
           <a:p>
-            <a:pPr indent="0" marL="0">
+            <a:pPr marL="0" indent="0">
               <a:buNone/>
             </a:pPr>
             <a:r>
@@ -6043,7 +6131,7 @@
           <a:bodyPr wrap="square" lIns="0" tIns="0" rIns="0" bIns="0" rtlCol="0" anchor="ctr"/>
           <a:lstStyle/>
           <a:p>
-            <a:pPr indent="0" marL="0">
+            <a:pPr marL="0" indent="0">
               <a:buNone/>
             </a:pPr>
             <a:r>
@@ -6085,6 +6173,13 @@
             <a:prstDash val="solid"/>
           </a:ln>
         </p:spPr>
+        <p:txBody>
+          <a:bodyPr/>
+          <a:lstStyle/>
+          <a:p>
+            <a:endParaRPr lang="en-GB"/>
+          </a:p>
+        </p:txBody>
       </p:sp>
       <p:sp>
         <p:nvSpPr>
@@ -6107,13 +6202,13 @@
           <a:bodyPr wrap="square" rtlCol="0" anchor="ctr"/>
           <a:lstStyle/>
           <a:p>
-            <a:pPr indent="0" marL="0">
+            <a:pPr marL="0" indent="0">
               <a:buNone/>
             </a:pPr>
             <a:r>
               <a:rPr lang="en-US" sz="1150" dirty="0">
                 <a:solidFill>
-                  <a:srgbClr val="5A6E5A"/>
+                  <a:schemeClr val="accent6"/>
                 </a:solidFill>
                 <a:latin typeface="Calibri" pitchFamily="34" charset="0"/>
                 <a:ea typeface="Calibri" pitchFamily="34" charset="-122"/>
@@ -6121,7 +6216,11 @@
               </a:rPr>
               <a:t>Личные кабинеты — история поиска и избранные рецепты</a:t>
             </a:r>
-            <a:endParaRPr lang="en-US" sz="1150" dirty="0"/>
+            <a:endParaRPr lang="en-US" sz="1150" dirty="0">
+              <a:solidFill>
+                <a:schemeClr val="accent6"/>
+              </a:solidFill>
+            </a:endParaRPr>
           </a:p>
         </p:txBody>
       </p:sp>
@@ -6149,6 +6248,13 @@
             <a:prstDash val="solid"/>
           </a:ln>
         </p:spPr>
+        <p:txBody>
+          <a:bodyPr/>
+          <a:lstStyle/>
+          <a:p>
+            <a:endParaRPr lang="en-GB"/>
+          </a:p>
+        </p:txBody>
       </p:sp>
       <p:sp>
         <p:nvSpPr>
@@ -6171,13 +6277,13 @@
           <a:bodyPr wrap="square" rtlCol="0" anchor="ctr"/>
           <a:lstStyle/>
           <a:p>
-            <a:pPr indent="0" marL="0">
+            <a:pPr marL="0" indent="0">
               <a:buNone/>
             </a:pPr>
             <a:r>
               <a:rPr lang="en-US" sz="1150" dirty="0">
                 <a:solidFill>
-                  <a:srgbClr val="5A6E5A"/>
+                  <a:schemeClr val="accent6"/>
                 </a:solidFill>
                 <a:latin typeface="Calibri" pitchFamily="34" charset="0"/>
                 <a:ea typeface="Calibri" pitchFamily="34" charset="-122"/>
@@ -6185,7 +6291,11 @@
               </a:rPr>
               <a:t>Расчёт КБЖУ для каждого блюда</a:t>
             </a:r>
-            <a:endParaRPr lang="en-US" sz="1150" dirty="0"/>
+            <a:endParaRPr lang="en-US" sz="1150" dirty="0">
+              <a:solidFill>
+                <a:schemeClr val="accent6"/>
+              </a:solidFill>
+            </a:endParaRPr>
           </a:p>
         </p:txBody>
       </p:sp>
@@ -6213,6 +6323,13 @@
             <a:prstDash val="solid"/>
           </a:ln>
         </p:spPr>
+        <p:txBody>
+          <a:bodyPr/>
+          <a:lstStyle/>
+          <a:p>
+            <a:endParaRPr lang="en-GB"/>
+          </a:p>
+        </p:txBody>
       </p:sp>
       <p:sp>
         <p:nvSpPr>
@@ -6235,13 +6352,13 @@
           <a:bodyPr wrap="square" rtlCol="0" anchor="ctr"/>
           <a:lstStyle/>
           <a:p>
-            <a:pPr indent="0" marL="0">
+            <a:pPr marL="0" indent="0">
               <a:buNone/>
             </a:pPr>
             <a:r>
               <a:rPr lang="en-US" sz="1150" dirty="0">
                 <a:solidFill>
-                  <a:srgbClr val="5A6E5A"/>
+                  <a:schemeClr val="accent6"/>
                 </a:solidFill>
                 <a:latin typeface="Calibri" pitchFamily="34" charset="0"/>
                 <a:ea typeface="Calibri" pitchFamily="34" charset="-122"/>
@@ -6249,7 +6366,11 @@
               </a:rPr>
               <a:t>UGC — добавление рецептов пользователями</a:t>
             </a:r>
-            <a:endParaRPr lang="en-US" sz="1150" dirty="0"/>
+            <a:endParaRPr lang="en-US" sz="1150" dirty="0">
+              <a:solidFill>
+                <a:schemeClr val="accent6"/>
+              </a:solidFill>
+            </a:endParaRPr>
           </a:p>
         </p:txBody>
       </p:sp>
@@ -6277,6 +6398,13 @@
             <a:prstDash val="solid"/>
           </a:ln>
         </p:spPr>
+        <p:txBody>
+          <a:bodyPr/>
+          <a:lstStyle/>
+          <a:p>
+            <a:endParaRPr lang="en-GB"/>
+          </a:p>
+        </p:txBody>
       </p:sp>
       <p:sp>
         <p:nvSpPr>
@@ -6299,13 +6427,13 @@
           <a:bodyPr wrap="square" rtlCol="0" anchor="ctr"/>
           <a:lstStyle/>
           <a:p>
-            <a:pPr indent="0" marL="0">
+            <a:pPr marL="0" indent="0">
               <a:buNone/>
             </a:pPr>
             <a:r>
               <a:rPr lang="en-US" sz="1150" dirty="0">
                 <a:solidFill>
-                  <a:srgbClr val="5A6E5A"/>
+                  <a:schemeClr val="accent6"/>
                 </a:solidFill>
                 <a:latin typeface="Calibri" pitchFamily="34" charset="0"/>
                 <a:ea typeface="Calibri" pitchFamily="34" charset="-122"/>
@@ -6313,50 +6441,292 @@
               </a:rPr>
               <a:t>PWA — мобильное приложение без установки</a:t>
             </a:r>
-            <a:endParaRPr lang="en-US" sz="1150" dirty="0"/>
-          </a:p>
-        </p:txBody>
-      </p:sp>
-      <p:sp>
-        <p:nvSpPr>
-          <p:cNvPr id="29" name="Text 27"/>
-          <p:cNvSpPr/>
-          <p:nvPr/>
-        </p:nvSpPr>
-        <p:spPr>
-          <a:xfrm>
-            <a:off x="502920" y="4681728"/>
-            <a:ext cx="5760720" cy="292608"/>
+            <a:endParaRPr lang="en-US" sz="1150" dirty="0">
+              <a:solidFill>
+                <a:schemeClr val="accent6"/>
+              </a:solidFill>
+            </a:endParaRPr>
+          </a:p>
+        </p:txBody>
+      </p:sp>
+    </p:spTree>
+  </p:cSld>
+  <p:clrMapOvr>
+    <a:masterClrMapping/>
+  </p:clrMapOvr>
+</p:sld>
+</file>
+
+<file path=ppt/slides/slide13.xml><?xml version="1.0" encoding="utf-8"?>
+<p:sld xmlns:a="http://schemas.openxmlformats.org/drawingml/2006/main" xmlns:r="http://schemas.openxmlformats.org/officeDocument/2006/relationships" xmlns:p="http://schemas.openxmlformats.org/presentationml/2006/main">
+  <p:cSld>
+    <p:bg>
+      <p:bgPr>
+        <a:solidFill>
+          <a:srgbClr val="1A3C2E"/>
+        </a:solidFill>
+        <a:effectLst/>
+      </p:bgPr>
+    </p:bg>
+    <p:spTree>
+      <p:nvGrpSpPr>
+        <p:cNvPr id="1" name="">
+          <a:extLst>
+            <a:ext uri="{FF2B5EF4-FFF2-40B4-BE49-F238E27FC236}">
+              <a16:creationId xmlns:a16="http://schemas.microsoft.com/office/drawing/2014/main" id="{E9E061D7-A6A0-43BA-472B-2164D1D03493}"/>
+            </a:ext>
+          </a:extLst>
+        </p:cNvPr>
+        <p:cNvGrpSpPr/>
+        <p:nvPr/>
+      </p:nvGrpSpPr>
+      <p:grpSpPr>
+        <a:xfrm>
+          <a:off x="0" y="0"/>
+          <a:ext cx="0" cy="0"/>
+          <a:chOff x="0" y="0"/>
+          <a:chExt cx="0" cy="0"/>
+        </a:xfrm>
+      </p:grpSpPr>
+      <p:sp>
+        <p:nvSpPr>
+          <p:cNvPr id="2" name="Shape 0">
+            <a:extLst>
+              <a:ext uri="{FF2B5EF4-FFF2-40B4-BE49-F238E27FC236}">
+                <a16:creationId xmlns:a16="http://schemas.microsoft.com/office/drawing/2014/main" id="{D3B117CD-E9A6-1A56-0907-BF5B6D47D9D1}"/>
+              </a:ext>
+            </a:extLst>
+          </p:cNvPr>
+          <p:cNvSpPr/>
+          <p:nvPr/>
+        </p:nvSpPr>
+        <p:spPr>
+          <a:xfrm>
+            <a:off x="0" y="0"/>
+            <a:ext cx="9144000" cy="82296"/>
+          </a:xfrm>
+          <a:prstGeom prst="rect">
+            <a:avLst/>
+          </a:prstGeom>
+          <a:solidFill>
+            <a:srgbClr val="97BC62"/>
+          </a:solidFill>
+          <a:ln w="12700">
+            <a:solidFill>
+              <a:srgbClr val="97BC62"/>
+            </a:solidFill>
+            <a:prstDash val="solid"/>
+          </a:ln>
+        </p:spPr>
+        <p:txBody>
+          <a:bodyPr/>
+          <a:lstStyle/>
+          <a:p>
+            <a:endParaRPr lang="en-GB"/>
+          </a:p>
+        </p:txBody>
+      </p:sp>
+      <p:sp>
+        <p:nvSpPr>
+          <p:cNvPr id="30" name="TextBox 29">
+            <a:extLst>
+              <a:ext uri="{FF2B5EF4-FFF2-40B4-BE49-F238E27FC236}">
+                <a16:creationId xmlns:a16="http://schemas.microsoft.com/office/drawing/2014/main" id="{0E238972-8C55-E631-3DFC-0AA8C50F6BC4}"/>
+              </a:ext>
+            </a:extLst>
+          </p:cNvPr>
+          <p:cNvSpPr txBox="1"/>
+          <p:nvPr/>
+        </p:nvSpPr>
+        <p:spPr>
+          <a:xfrm>
+            <a:off x="161144" y="201331"/>
+            <a:ext cx="4579494" cy="584775"/>
           </a:xfrm>
           <a:prstGeom prst="rect">
             <a:avLst/>
           </a:prstGeom>
           <a:noFill/>
-          <a:ln/>
-        </p:spPr>
-        <p:txBody>
-          <a:bodyPr wrap="square" rtlCol="0" anchor="ctr"/>
-          <a:lstStyle/>
-          <a:p>
-            <a:pPr indent="0" marL="0">
+        </p:spPr>
+        <p:txBody>
+          <a:bodyPr wrap="square">
+            <a:spAutoFit/>
+          </a:bodyPr>
+          <a:lstStyle/>
+          <a:p>
+            <a:pPr marL="0" indent="0">
               <a:buNone/>
             </a:pPr>
             <a:r>
-              <a:rPr lang="en-US" sz="1300" b="1" dirty="0">
+              <a:rPr lang="ru-RU" sz="3200" b="1" dirty="0">
                 <a:solidFill>
                   <a:srgbClr val="97BC62"/>
                 </a:solidFill>
                 <a:latin typeface="Calibri" pitchFamily="34" charset="0"/>
-                <a:ea typeface="Calibri" pitchFamily="34" charset="-122"/>
                 <a:cs typeface="Calibri" pitchFamily="34" charset="-120"/>
               </a:rPr>
-              <a:t>Спасибо за внимание! Готов ответить на вопросы.</a:t>
-            </a:r>
-            <a:endParaRPr lang="en-US" sz="1300" dirty="0"/>
+              <a:t>Ссылки</a:t>
+            </a:r>
+            <a:endParaRPr lang="en-US" sz="3200" dirty="0"/>
+          </a:p>
+        </p:txBody>
+      </p:sp>
+      <p:pic>
+        <p:nvPicPr>
+          <p:cNvPr id="32" name="Рисунок 31">
+            <a:extLst>
+              <a:ext uri="{FF2B5EF4-FFF2-40B4-BE49-F238E27FC236}">
+                <a16:creationId xmlns:a16="http://schemas.microsoft.com/office/drawing/2014/main" id="{F85308CA-1CC7-3912-1014-4702B4360454}"/>
+              </a:ext>
+            </a:extLst>
+          </p:cNvPr>
+          <p:cNvPicPr>
+            <a:picLocks noChangeAspect="1"/>
+          </p:cNvPicPr>
+          <p:nvPr/>
+        </p:nvPicPr>
+        <p:blipFill>
+          <a:blip>
+            <a:extLst>
+              <a:ext uri="{96DAC541-7B7A-43D3-8B79-37D633B846F1}">
+                <asvg:svgBlip xmlns:asvg="http://schemas.microsoft.com/office/drawing/2016/SVG/main" r:embed="rId3"/>
+              </a:ext>
+            </a:extLst>
+          </a:blip>
+          <a:stretch>
+            <a:fillRect/>
+          </a:stretch>
+        </p:blipFill>
+        <p:spPr>
+          <a:xfrm>
+            <a:off x="1431404" y="1145653"/>
+            <a:ext cx="2372506" cy="2372506"/>
+          </a:xfrm>
+          <a:prstGeom prst="rect">
+            <a:avLst/>
+          </a:prstGeom>
+        </p:spPr>
+      </p:pic>
+      <p:pic>
+        <p:nvPicPr>
+          <p:cNvPr id="34" name="Рисунок 33">
+            <a:extLst>
+              <a:ext uri="{FF2B5EF4-FFF2-40B4-BE49-F238E27FC236}">
+                <a16:creationId xmlns:a16="http://schemas.microsoft.com/office/drawing/2014/main" id="{B07A4B63-57F8-71DF-FC37-F0B3447C042D}"/>
+              </a:ext>
+            </a:extLst>
+          </p:cNvPr>
+          <p:cNvPicPr>
+            <a:picLocks noChangeAspect="1"/>
+          </p:cNvPicPr>
+          <p:nvPr/>
+        </p:nvPicPr>
+        <p:blipFill>
+          <a:blip>
+            <a:extLst>
+              <a:ext uri="{96DAC541-7B7A-43D3-8B79-37D633B846F1}">
+                <asvg:svgBlip xmlns:asvg="http://schemas.microsoft.com/office/drawing/2016/SVG/main" r:embed="rId4"/>
+              </a:ext>
+            </a:extLst>
+          </a:blip>
+          <a:stretch>
+            <a:fillRect/>
+          </a:stretch>
+        </p:blipFill>
+        <p:spPr>
+          <a:xfrm>
+            <a:off x="5568847" y="1145654"/>
+            <a:ext cx="2372505" cy="2372505"/>
+          </a:xfrm>
+          <a:prstGeom prst="rect">
+            <a:avLst/>
+          </a:prstGeom>
+        </p:spPr>
+      </p:pic>
+      <p:sp>
+        <p:nvSpPr>
+          <p:cNvPr id="36" name="TextBox 35">
+            <a:extLst>
+              <a:ext uri="{FF2B5EF4-FFF2-40B4-BE49-F238E27FC236}">
+                <a16:creationId xmlns:a16="http://schemas.microsoft.com/office/drawing/2014/main" id="{B0D84693-486E-94A2-5B13-802684F616D9}"/>
+              </a:ext>
+            </a:extLst>
+          </p:cNvPr>
+          <p:cNvSpPr txBox="1"/>
+          <p:nvPr/>
+        </p:nvSpPr>
+        <p:spPr>
+          <a:xfrm>
+            <a:off x="663315" y="3658934"/>
+            <a:ext cx="3908685" cy="338554"/>
+          </a:xfrm>
+          <a:prstGeom prst="rect">
+            <a:avLst/>
+          </a:prstGeom>
+          <a:noFill/>
+        </p:spPr>
+        <p:txBody>
+          <a:bodyPr wrap="square">
+            <a:spAutoFit/>
+          </a:bodyPr>
+          <a:lstStyle/>
+          <a:p>
+            <a:r>
+              <a:rPr lang="en-GB" sz="1600" dirty="0">
+                <a:solidFill>
+                  <a:schemeClr val="accent6"/>
+                </a:solidFill>
+              </a:rPr>
+              <a:t>https://github.com/tenkopeek/recipe_finder</a:t>
+            </a:r>
+          </a:p>
+        </p:txBody>
+      </p:sp>
+      <p:sp>
+        <p:nvSpPr>
+          <p:cNvPr id="38" name="TextBox 37">
+            <a:extLst>
+              <a:ext uri="{FF2B5EF4-FFF2-40B4-BE49-F238E27FC236}">
+                <a16:creationId xmlns:a16="http://schemas.microsoft.com/office/drawing/2014/main" id="{5CFEEFAF-8824-050D-B60F-0D637FD74CE0}"/>
+              </a:ext>
+            </a:extLst>
+          </p:cNvPr>
+          <p:cNvSpPr txBox="1"/>
+          <p:nvPr/>
+        </p:nvSpPr>
+        <p:spPr>
+          <a:xfrm>
+            <a:off x="5123045" y="3645278"/>
+            <a:ext cx="3428843" cy="338554"/>
+          </a:xfrm>
+          <a:prstGeom prst="rect">
+            <a:avLst/>
+          </a:prstGeom>
+          <a:noFill/>
+        </p:spPr>
+        <p:txBody>
+          <a:bodyPr wrap="square">
+            <a:spAutoFit/>
+          </a:bodyPr>
+          <a:lstStyle/>
+          <a:p>
+            <a:r>
+              <a:rPr lang="en-GB" sz="1600" dirty="0">
+                <a:solidFill>
+                  <a:schemeClr val="accent6"/>
+                </a:solidFill>
+              </a:rPr>
+              <a:t>https://moiiom.pythonanywhere.com/</a:t>
+            </a:r>
           </a:p>
         </p:txBody>
       </p:sp>
     </p:spTree>
+    <p:extLst>
+      <p:ext uri="{BB962C8B-B14F-4D97-AF65-F5344CB8AC3E}">
+        <p14:creationId xmlns:p14="http://schemas.microsoft.com/office/powerpoint/2010/main" val="2685252476"/>
+      </p:ext>
+    </p:extLst>
   </p:cSld>
   <p:clrMapOvr>
     <a:masterClrMapping/>
@@ -6372,6 +6742,7 @@
         <a:solidFill>
           <a:srgbClr val="EDF4E8"/>
         </a:solidFill>
+        <a:effectLst/>
       </p:bgPr>
     </p:bg>
     <p:spTree>
@@ -6409,7 +6780,7 @@
           <a:bodyPr wrap="square" lIns="0" tIns="0" rIns="0" bIns="0" rtlCol="0" anchor="ctr"/>
           <a:lstStyle/>
           <a:p>
-            <a:pPr algn="l" indent="0" marL="0">
+            <a:pPr marL="0" indent="0" algn="l">
               <a:buNone/>
             </a:pPr>
             <a:r>
@@ -6451,6 +6822,13 @@
             <a:prstDash val="solid"/>
           </a:ln>
         </p:spPr>
+        <p:txBody>
+          <a:bodyPr/>
+          <a:lstStyle/>
+          <a:p>
+            <a:endParaRPr lang="en-GB"/>
+          </a:p>
+        </p:txBody>
       </p:sp>
       <p:sp>
         <p:nvSpPr>
@@ -6476,13 +6854,20 @@
             <a:prstDash val="solid"/>
           </a:ln>
           <a:effectLst>
-            <a:outerShdw sx="100000" sy="100000" kx="0" ky="0" algn="bl" rotWithShape="0" blurRad="63500" dist="25400" dir="8100000">
+            <a:outerShdw blurRad="63500" dist="25400" dir="8100000" algn="bl" rotWithShape="0">
               <a:srgbClr val="000000">
                 <a:alpha val="10000"/>
               </a:srgbClr>
             </a:outerShdw>
           </a:effectLst>
         </p:spPr>
+        <p:txBody>
+          <a:bodyPr/>
+          <a:lstStyle/>
+          <a:p>
+            <a:endParaRPr lang="en-GB"/>
+          </a:p>
+        </p:txBody>
       </p:sp>
       <p:sp>
         <p:nvSpPr>
@@ -6508,6 +6893,13 @@
             <a:prstDash val="solid"/>
           </a:ln>
         </p:spPr>
+        <p:txBody>
+          <a:bodyPr/>
+          <a:lstStyle/>
+          <a:p>
+            <a:endParaRPr lang="en-GB"/>
+          </a:p>
+        </p:txBody>
       </p:sp>
       <p:sp>
         <p:nvSpPr>
@@ -6530,7 +6922,7 @@
           <a:bodyPr wrap="square" lIns="0" tIns="0" rIns="0" bIns="0" rtlCol="0" anchor="ctr"/>
           <a:lstStyle/>
           <a:p>
-            <a:pPr indent="0" marL="0">
+            <a:pPr marL="0" indent="0">
               <a:buNone/>
             </a:pPr>
             <a:r>
@@ -6657,13 +7049,20 @@
             <a:prstDash val="solid"/>
           </a:ln>
           <a:effectLst>
-            <a:outerShdw sx="100000" sy="100000" kx="0" ky="0" algn="bl" rotWithShape="0" blurRad="63500" dist="25400" dir="8100000">
+            <a:outerShdw blurRad="63500" dist="25400" dir="8100000" algn="bl" rotWithShape="0">
               <a:srgbClr val="000000">
                 <a:alpha val="10000"/>
               </a:srgbClr>
             </a:outerShdw>
           </a:effectLst>
         </p:spPr>
+        <p:txBody>
+          <a:bodyPr/>
+          <a:lstStyle/>
+          <a:p>
+            <a:endParaRPr lang="en-GB"/>
+          </a:p>
+        </p:txBody>
       </p:sp>
       <p:sp>
         <p:nvSpPr>
@@ -6689,6 +7088,13 @@
             <a:prstDash val="solid"/>
           </a:ln>
         </p:spPr>
+        <p:txBody>
+          <a:bodyPr/>
+          <a:lstStyle/>
+          <a:p>
+            <a:endParaRPr lang="en-GB"/>
+          </a:p>
+        </p:txBody>
       </p:sp>
       <p:sp>
         <p:nvSpPr>
@@ -6711,7 +7117,7 @@
           <a:bodyPr wrap="square" lIns="0" tIns="0" rIns="0" bIns="0" rtlCol="0" anchor="ctr"/>
           <a:lstStyle/>
           <a:p>
-            <a:pPr indent="0" marL="0">
+            <a:pPr marL="0" indent="0">
               <a:buNone/>
             </a:pPr>
             <a:r>
@@ -6750,7 +7156,7 @@
           <a:bodyPr wrap="square" rtlCol="0" anchor="t"/>
           <a:lstStyle/>
           <a:p>
-            <a:pPr indent="0" marL="0">
+            <a:pPr marL="0" indent="0">
               <a:buNone/>
             </a:pPr>
             <a:r>
@@ -6792,13 +7198,20 @@
             <a:prstDash val="solid"/>
           </a:ln>
           <a:effectLst>
-            <a:outerShdw sx="100000" sy="100000" kx="0" ky="0" algn="bl" rotWithShape="0" blurRad="63500" dist="25400" dir="8100000">
+            <a:outerShdw blurRad="63500" dist="25400" dir="8100000" algn="bl" rotWithShape="0">
               <a:srgbClr val="000000">
                 <a:alpha val="10000"/>
               </a:srgbClr>
             </a:outerShdw>
           </a:effectLst>
         </p:spPr>
+        <p:txBody>
+          <a:bodyPr/>
+          <a:lstStyle/>
+          <a:p>
+            <a:endParaRPr lang="en-GB"/>
+          </a:p>
+        </p:txBody>
       </p:sp>
       <p:sp>
         <p:nvSpPr>
@@ -6821,7 +7234,7 @@
           <a:bodyPr wrap="square" lIns="0" tIns="0" rIns="0" bIns="0" rtlCol="0" anchor="ctr"/>
           <a:lstStyle/>
           <a:p>
-            <a:pPr indent="0" marL="0">
+            <a:pPr marL="0" indent="0">
               <a:buNone/>
             </a:pPr>
             <a:r>
@@ -6860,7 +7273,7 @@
           <a:bodyPr wrap="square" rtlCol="0" anchor="ctr"/>
           <a:lstStyle/>
           <a:p>
-            <a:pPr algn="ctr" indent="0" marL="0">
+            <a:pPr marL="0" indent="0" algn="ctr">
               <a:buNone/>
             </a:pPr>
             <a:r>
@@ -6900,6 +7313,13 @@
             <a:prstDash val="solid"/>
           </a:ln>
         </p:spPr>
+        <p:txBody>
+          <a:bodyPr/>
+          <a:lstStyle/>
+          <a:p>
+            <a:endParaRPr lang="en-GB"/>
+          </a:p>
+        </p:txBody>
       </p:sp>
       <p:sp>
         <p:nvSpPr>
@@ -6922,7 +7342,7 @@
           <a:bodyPr wrap="square" rtlCol="0" anchor="ctr"/>
           <a:lstStyle/>
           <a:p>
-            <a:pPr algn="ctr" indent="0" marL="0">
+            <a:pPr marL="0" indent="0" algn="ctr">
               <a:buNone/>
             </a:pPr>
             <a:r>
@@ -6962,6 +7382,13 @@
             <a:prstDash val="solid"/>
           </a:ln>
         </p:spPr>
+        <p:txBody>
+          <a:bodyPr/>
+          <a:lstStyle/>
+          <a:p>
+            <a:endParaRPr lang="en-GB"/>
+          </a:p>
+        </p:txBody>
       </p:sp>
       <p:sp>
         <p:nvSpPr>
@@ -6984,7 +7411,7 @@
           <a:bodyPr wrap="square" rtlCol="0" anchor="ctr"/>
           <a:lstStyle/>
           <a:p>
-            <a:pPr algn="ctr" indent="0" marL="0">
+            <a:pPr marL="0" indent="0" algn="ctr">
               <a:buNone/>
             </a:pPr>
             <a:r>
@@ -7018,6 +7445,7 @@
         <a:solidFill>
           <a:srgbClr val="EDF4E8"/>
         </a:solidFill>
+        <a:effectLst/>
       </p:bgPr>
     </p:bg>
     <p:spTree>
@@ -7055,7 +7483,7 @@
           <a:bodyPr wrap="square" lIns="0" tIns="0" rIns="0" bIns="0" rtlCol="0" anchor="ctr"/>
           <a:lstStyle/>
           <a:p>
-            <a:pPr algn="l" indent="0" marL="0">
+            <a:pPr marL="0" indent="0" algn="l">
               <a:buNone/>
             </a:pPr>
             <a:r>
@@ -7097,6 +7525,13 @@
             <a:prstDash val="solid"/>
           </a:ln>
         </p:spPr>
+        <p:txBody>
+          <a:bodyPr/>
+          <a:lstStyle/>
+          <a:p>
+            <a:endParaRPr lang="en-GB"/>
+          </a:p>
+        </p:txBody>
       </p:sp>
       <p:sp>
         <p:nvSpPr>
@@ -7122,13 +7557,20 @@
             <a:prstDash val="solid"/>
           </a:ln>
           <a:effectLst>
-            <a:outerShdw sx="100000" sy="100000" kx="0" ky="0" algn="bl" rotWithShape="0" blurRad="63500" dist="25400" dir="8100000">
+            <a:outerShdw blurRad="63500" dist="25400" dir="8100000" algn="bl" rotWithShape="0">
               <a:srgbClr val="000000">
                 <a:alpha val="10000"/>
               </a:srgbClr>
             </a:outerShdw>
           </a:effectLst>
         </p:spPr>
+        <p:txBody>
+          <a:bodyPr/>
+          <a:lstStyle/>
+          <a:p>
+            <a:endParaRPr lang="en-GB"/>
+          </a:p>
+        </p:txBody>
       </p:sp>
       <p:sp>
         <p:nvSpPr>
@@ -7154,6 +7596,13 @@
             <a:prstDash val="solid"/>
           </a:ln>
         </p:spPr>
+        <p:txBody>
+          <a:bodyPr/>
+          <a:lstStyle/>
+          <a:p>
+            <a:endParaRPr lang="en-GB"/>
+          </a:p>
+        </p:txBody>
       </p:sp>
       <p:sp>
         <p:nvSpPr>
@@ -7179,6 +7628,13 @@
             <a:prstDash val="solid"/>
           </a:ln>
         </p:spPr>
+        <p:txBody>
+          <a:bodyPr/>
+          <a:lstStyle/>
+          <a:p>
+            <a:endParaRPr lang="en-GB"/>
+          </a:p>
+        </p:txBody>
       </p:sp>
       <p:sp>
         <p:nvSpPr>
@@ -7201,7 +7657,7 @@
           <a:bodyPr wrap="square" lIns="0" tIns="0" rIns="0" bIns="0" rtlCol="0" anchor="ctr"/>
           <a:lstStyle/>
           <a:p>
-            <a:pPr algn="ctr" indent="0" marL="0">
+            <a:pPr marL="0" indent="0" algn="ctr">
               <a:buNone/>
             </a:pPr>
             <a:r>
@@ -7240,7 +7696,7 @@
           <a:bodyPr wrap="square" lIns="0" tIns="0" rIns="0" bIns="0" rtlCol="0" anchor="ctr"/>
           <a:lstStyle/>
           <a:p>
-            <a:pPr indent="0" marL="0">
+            <a:pPr marL="0" indent="0">
               <a:buNone/>
             </a:pPr>
             <a:r>
@@ -7279,7 +7735,7 @@
           <a:bodyPr wrap="square" rtlCol="0" anchor="t"/>
           <a:lstStyle/>
           <a:p>
-            <a:pPr indent="0" marL="0">
+            <a:pPr marL="0" indent="0">
               <a:buNone/>
             </a:pPr>
             <a:r>
@@ -7321,13 +7777,20 @@
             <a:prstDash val="solid"/>
           </a:ln>
           <a:effectLst>
-            <a:outerShdw sx="100000" sy="100000" kx="0" ky="0" algn="bl" rotWithShape="0" blurRad="63500" dist="25400" dir="8100000">
+            <a:outerShdw blurRad="63500" dist="25400" dir="8100000" algn="bl" rotWithShape="0">
               <a:srgbClr val="000000">
                 <a:alpha val="10000"/>
               </a:srgbClr>
             </a:outerShdw>
           </a:effectLst>
         </p:spPr>
+        <p:txBody>
+          <a:bodyPr/>
+          <a:lstStyle/>
+          <a:p>
+            <a:endParaRPr lang="en-GB"/>
+          </a:p>
+        </p:txBody>
       </p:sp>
       <p:sp>
         <p:nvSpPr>
@@ -7353,6 +7816,13 @@
             <a:prstDash val="solid"/>
           </a:ln>
         </p:spPr>
+        <p:txBody>
+          <a:bodyPr/>
+          <a:lstStyle/>
+          <a:p>
+            <a:endParaRPr lang="en-GB"/>
+          </a:p>
+        </p:txBody>
       </p:sp>
       <p:sp>
         <p:nvSpPr>
@@ -7378,6 +7848,13 @@
             <a:prstDash val="solid"/>
           </a:ln>
         </p:spPr>
+        <p:txBody>
+          <a:bodyPr/>
+          <a:lstStyle/>
+          <a:p>
+            <a:endParaRPr lang="en-GB"/>
+          </a:p>
+        </p:txBody>
       </p:sp>
       <p:sp>
         <p:nvSpPr>
@@ -7400,7 +7877,7 @@
           <a:bodyPr wrap="square" lIns="0" tIns="0" rIns="0" bIns="0" rtlCol="0" anchor="ctr"/>
           <a:lstStyle/>
           <a:p>
-            <a:pPr algn="ctr" indent="0" marL="0">
+            <a:pPr marL="0" indent="0" algn="ctr">
               <a:buNone/>
             </a:pPr>
             <a:r>
@@ -7439,7 +7916,7 @@
           <a:bodyPr wrap="square" lIns="0" tIns="0" rIns="0" bIns="0" rtlCol="0" anchor="ctr"/>
           <a:lstStyle/>
           <a:p>
-            <a:pPr indent="0" marL="0">
+            <a:pPr marL="0" indent="0">
               <a:buNone/>
             </a:pPr>
             <a:r>
@@ -7478,7 +7955,7 @@
           <a:bodyPr wrap="square" rtlCol="0" anchor="t"/>
           <a:lstStyle/>
           <a:p>
-            <a:pPr indent="0" marL="0">
+            <a:pPr marL="0" indent="0">
               <a:buNone/>
             </a:pPr>
             <a:r>
@@ -7520,13 +7997,20 @@
             <a:prstDash val="solid"/>
           </a:ln>
           <a:effectLst>
-            <a:outerShdw sx="100000" sy="100000" kx="0" ky="0" algn="bl" rotWithShape="0" blurRad="63500" dist="25400" dir="8100000">
+            <a:outerShdw blurRad="63500" dist="25400" dir="8100000" algn="bl" rotWithShape="0">
               <a:srgbClr val="000000">
                 <a:alpha val="10000"/>
               </a:srgbClr>
             </a:outerShdw>
           </a:effectLst>
         </p:spPr>
+        <p:txBody>
+          <a:bodyPr/>
+          <a:lstStyle/>
+          <a:p>
+            <a:endParaRPr lang="en-GB"/>
+          </a:p>
+        </p:txBody>
       </p:sp>
       <p:sp>
         <p:nvSpPr>
@@ -7552,6 +8036,13 @@
             <a:prstDash val="solid"/>
           </a:ln>
         </p:spPr>
+        <p:txBody>
+          <a:bodyPr/>
+          <a:lstStyle/>
+          <a:p>
+            <a:endParaRPr lang="en-GB"/>
+          </a:p>
+        </p:txBody>
       </p:sp>
       <p:sp>
         <p:nvSpPr>
@@ -7577,6 +8068,13 @@
             <a:prstDash val="solid"/>
           </a:ln>
         </p:spPr>
+        <p:txBody>
+          <a:bodyPr/>
+          <a:lstStyle/>
+          <a:p>
+            <a:endParaRPr lang="en-GB"/>
+          </a:p>
+        </p:txBody>
       </p:sp>
       <p:sp>
         <p:nvSpPr>
@@ -7599,7 +8097,7 @@
           <a:bodyPr wrap="square" lIns="0" tIns="0" rIns="0" bIns="0" rtlCol="0" anchor="ctr"/>
           <a:lstStyle/>
           <a:p>
-            <a:pPr algn="ctr" indent="0" marL="0">
+            <a:pPr marL="0" indent="0" algn="ctr">
               <a:buNone/>
             </a:pPr>
             <a:r>
@@ -7638,7 +8136,7 @@
           <a:bodyPr wrap="square" lIns="0" tIns="0" rIns="0" bIns="0" rtlCol="0" anchor="ctr"/>
           <a:lstStyle/>
           <a:p>
-            <a:pPr indent="0" marL="0">
+            <a:pPr marL="0" indent="0">
               <a:buNone/>
             </a:pPr>
             <a:r>
@@ -7677,7 +8175,7 @@
           <a:bodyPr wrap="square" rtlCol="0" anchor="t"/>
           <a:lstStyle/>
           <a:p>
-            <a:pPr indent="0" marL="0">
+            <a:pPr marL="0" indent="0">
               <a:buNone/>
             </a:pPr>
             <a:r>
@@ -7719,13 +8217,20 @@
             <a:prstDash val="solid"/>
           </a:ln>
           <a:effectLst>
-            <a:outerShdw sx="100000" sy="100000" kx="0" ky="0" algn="bl" rotWithShape="0" blurRad="63500" dist="25400" dir="8100000">
+            <a:outerShdw blurRad="63500" dist="25400" dir="8100000" algn="bl" rotWithShape="0">
               <a:srgbClr val="000000">
                 <a:alpha val="10000"/>
               </a:srgbClr>
             </a:outerShdw>
           </a:effectLst>
         </p:spPr>
+        <p:txBody>
+          <a:bodyPr/>
+          <a:lstStyle/>
+          <a:p>
+            <a:endParaRPr lang="en-GB"/>
+          </a:p>
+        </p:txBody>
       </p:sp>
       <p:sp>
         <p:nvSpPr>
@@ -7751,6 +8256,13 @@
             <a:prstDash val="solid"/>
           </a:ln>
         </p:spPr>
+        <p:txBody>
+          <a:bodyPr/>
+          <a:lstStyle/>
+          <a:p>
+            <a:endParaRPr lang="en-GB"/>
+          </a:p>
+        </p:txBody>
       </p:sp>
       <p:sp>
         <p:nvSpPr>
@@ -7776,6 +8288,13 @@
             <a:prstDash val="solid"/>
           </a:ln>
         </p:spPr>
+        <p:txBody>
+          <a:bodyPr/>
+          <a:lstStyle/>
+          <a:p>
+            <a:endParaRPr lang="en-GB"/>
+          </a:p>
+        </p:txBody>
       </p:sp>
       <p:sp>
         <p:nvSpPr>
@@ -7798,7 +8317,7 @@
           <a:bodyPr wrap="square" lIns="0" tIns="0" rIns="0" bIns="0" rtlCol="0" anchor="ctr"/>
           <a:lstStyle/>
           <a:p>
-            <a:pPr algn="ctr" indent="0" marL="0">
+            <a:pPr marL="0" indent="0" algn="ctr">
               <a:buNone/>
             </a:pPr>
             <a:r>
@@ -7837,7 +8356,7 @@
           <a:bodyPr wrap="square" lIns="0" tIns="0" rIns="0" bIns="0" rtlCol="0" anchor="ctr"/>
           <a:lstStyle/>
           <a:p>
-            <a:pPr indent="0" marL="0">
+            <a:pPr marL="0" indent="0">
               <a:buNone/>
             </a:pPr>
             <a:r>
@@ -7876,7 +8395,7 @@
           <a:bodyPr wrap="square" rtlCol="0" anchor="t"/>
           <a:lstStyle/>
           <a:p>
-            <a:pPr indent="0" marL="0">
+            <a:pPr marL="0" indent="0">
               <a:buNone/>
             </a:pPr>
             <a:r>
@@ -7918,13 +8437,20 @@
             <a:prstDash val="solid"/>
           </a:ln>
           <a:effectLst>
-            <a:outerShdw sx="100000" sy="100000" kx="0" ky="0" algn="bl" rotWithShape="0" blurRad="63500" dist="25400" dir="8100000">
+            <a:outerShdw blurRad="63500" dist="25400" dir="8100000" algn="bl" rotWithShape="0">
               <a:srgbClr val="000000">
                 <a:alpha val="10000"/>
               </a:srgbClr>
             </a:outerShdw>
           </a:effectLst>
         </p:spPr>
+        <p:txBody>
+          <a:bodyPr/>
+          <a:lstStyle/>
+          <a:p>
+            <a:endParaRPr lang="en-GB"/>
+          </a:p>
+        </p:txBody>
       </p:sp>
       <p:sp>
         <p:nvSpPr>
@@ -7950,6 +8476,13 @@
             <a:prstDash val="solid"/>
           </a:ln>
         </p:spPr>
+        <p:txBody>
+          <a:bodyPr/>
+          <a:lstStyle/>
+          <a:p>
+            <a:endParaRPr lang="en-GB"/>
+          </a:p>
+        </p:txBody>
       </p:sp>
       <p:sp>
         <p:nvSpPr>
@@ -7975,6 +8508,13 @@
             <a:prstDash val="solid"/>
           </a:ln>
         </p:spPr>
+        <p:txBody>
+          <a:bodyPr/>
+          <a:lstStyle/>
+          <a:p>
+            <a:endParaRPr lang="en-GB"/>
+          </a:p>
+        </p:txBody>
       </p:sp>
       <p:sp>
         <p:nvSpPr>
@@ -7997,7 +8537,7 @@
           <a:bodyPr wrap="square" lIns="0" tIns="0" rIns="0" bIns="0" rtlCol="0" anchor="ctr"/>
           <a:lstStyle/>
           <a:p>
-            <a:pPr algn="ctr" indent="0" marL="0">
+            <a:pPr marL="0" indent="0" algn="ctr">
               <a:buNone/>
             </a:pPr>
             <a:r>
@@ -8036,7 +8576,7 @@
           <a:bodyPr wrap="square" lIns="0" tIns="0" rIns="0" bIns="0" rtlCol="0" anchor="ctr"/>
           <a:lstStyle/>
           <a:p>
-            <a:pPr indent="0" marL="0">
+            <a:pPr marL="0" indent="0">
               <a:buNone/>
             </a:pPr>
             <a:r>
@@ -8075,7 +8615,7 @@
           <a:bodyPr wrap="square" rtlCol="0" anchor="t"/>
           <a:lstStyle/>
           <a:p>
-            <a:pPr indent="0" marL="0">
+            <a:pPr marL="0" indent="0">
               <a:buNone/>
             </a:pPr>
             <a:r>
@@ -8117,13 +8657,20 @@
             <a:prstDash val="solid"/>
           </a:ln>
           <a:effectLst>
-            <a:outerShdw sx="100000" sy="100000" kx="0" ky="0" algn="bl" rotWithShape="0" blurRad="63500" dist="25400" dir="8100000">
+            <a:outerShdw blurRad="63500" dist="25400" dir="8100000" algn="bl" rotWithShape="0">
               <a:srgbClr val="000000">
                 <a:alpha val="10000"/>
               </a:srgbClr>
             </a:outerShdw>
           </a:effectLst>
         </p:spPr>
+        <p:txBody>
+          <a:bodyPr/>
+          <a:lstStyle/>
+          <a:p>
+            <a:endParaRPr lang="en-GB"/>
+          </a:p>
+        </p:txBody>
       </p:sp>
       <p:sp>
         <p:nvSpPr>
@@ -8149,6 +8696,13 @@
             <a:prstDash val="solid"/>
           </a:ln>
         </p:spPr>
+        <p:txBody>
+          <a:bodyPr/>
+          <a:lstStyle/>
+          <a:p>
+            <a:endParaRPr lang="en-GB"/>
+          </a:p>
+        </p:txBody>
       </p:sp>
       <p:sp>
         <p:nvSpPr>
@@ -8174,6 +8728,13 @@
             <a:prstDash val="solid"/>
           </a:ln>
         </p:spPr>
+        <p:txBody>
+          <a:bodyPr/>
+          <a:lstStyle/>
+          <a:p>
+            <a:endParaRPr lang="en-GB"/>
+          </a:p>
+        </p:txBody>
       </p:sp>
       <p:sp>
         <p:nvSpPr>
@@ -8196,7 +8757,7 @@
           <a:bodyPr wrap="square" lIns="0" tIns="0" rIns="0" bIns="0" rtlCol="0" anchor="ctr"/>
           <a:lstStyle/>
           <a:p>
-            <a:pPr algn="ctr" indent="0" marL="0">
+            <a:pPr marL="0" indent="0" algn="ctr">
               <a:buNone/>
             </a:pPr>
             <a:r>
@@ -8235,7 +8796,7 @@
           <a:bodyPr wrap="square" lIns="0" tIns="0" rIns="0" bIns="0" rtlCol="0" anchor="ctr"/>
           <a:lstStyle/>
           <a:p>
-            <a:pPr indent="0" marL="0">
+            <a:pPr marL="0" indent="0">
               <a:buNone/>
             </a:pPr>
             <a:r>
@@ -8274,7 +8835,7 @@
           <a:bodyPr wrap="square" rtlCol="0" anchor="t"/>
           <a:lstStyle/>
           <a:p>
-            <a:pPr indent="0" marL="0">
+            <a:pPr marL="0" indent="0">
               <a:buNone/>
             </a:pPr>
             <a:r>
@@ -8308,6 +8869,7 @@
         <a:solidFill>
           <a:srgbClr val="EDF4E8"/>
         </a:solidFill>
+        <a:effectLst/>
       </p:bgPr>
     </p:bg>
     <p:spTree>
@@ -8345,7 +8907,7 @@
           <a:bodyPr wrap="square" lIns="0" tIns="0" rIns="0" bIns="0" rtlCol="0" anchor="ctr"/>
           <a:lstStyle/>
           <a:p>
-            <a:pPr algn="l" indent="0" marL="0">
+            <a:pPr marL="0" indent="0" algn="l">
               <a:buNone/>
             </a:pPr>
             <a:r>
@@ -8387,6 +8949,13 @@
             <a:prstDash val="solid"/>
           </a:ln>
         </p:spPr>
+        <p:txBody>
+          <a:bodyPr/>
+          <a:lstStyle/>
+          <a:p>
+            <a:endParaRPr lang="en-GB"/>
+          </a:p>
+        </p:txBody>
       </p:sp>
       <p:graphicFrame>
         <p:nvGraphicFramePr>
@@ -8404,18 +8973,48 @@
         </p:nvGraphicFramePr>
         <p:xfrm>
           <a:off x="365760" y="987552"/>
-          <a:ext cx="8412480" cy="914400"/>
+          <a:ext cx="8275320" cy="3104388"/>
         </p:xfrm>
         <a:graphic>
           <a:graphicData uri="http://schemas.openxmlformats.org/drawingml/2006/table">
             <a:tbl>
               <a:tblPr/>
               <a:tblGrid>
-                <a:gridCol w="2834640"/>
-                <a:gridCol w="1280160"/>
-                <a:gridCol w="1188720"/>
-                <a:gridCol w="1417320"/>
-                <a:gridCol w="1554480"/>
+                <a:gridCol w="2834640">
+                  <a:extLst>
+                    <a:ext uri="{9D8B030D-6E8A-4147-A177-3AD203B41FA5}">
+                      <a16:colId xmlns:a16="http://schemas.microsoft.com/office/drawing/2014/main" val="20000"/>
+                    </a:ext>
+                  </a:extLst>
+                </a:gridCol>
+                <a:gridCol w="1280160">
+                  <a:extLst>
+                    <a:ext uri="{9D8B030D-6E8A-4147-A177-3AD203B41FA5}">
+                      <a16:colId xmlns:a16="http://schemas.microsoft.com/office/drawing/2014/main" val="20001"/>
+                    </a:ext>
+                  </a:extLst>
+                </a:gridCol>
+                <a:gridCol w="1188720">
+                  <a:extLst>
+                    <a:ext uri="{9D8B030D-6E8A-4147-A177-3AD203B41FA5}">
+                      <a16:colId xmlns:a16="http://schemas.microsoft.com/office/drawing/2014/main" val="20002"/>
+                    </a:ext>
+                  </a:extLst>
+                </a:gridCol>
+                <a:gridCol w="1417320">
+                  <a:extLst>
+                    <a:ext uri="{9D8B030D-6E8A-4147-A177-3AD203B41FA5}">
+                      <a16:colId xmlns:a16="http://schemas.microsoft.com/office/drawing/2014/main" val="20003"/>
+                    </a:ext>
+                  </a:extLst>
+                </a:gridCol>
+                <a:gridCol w="1554480">
+                  <a:extLst>
+                    <a:ext uri="{9D8B030D-6E8A-4147-A177-3AD203B41FA5}">
+                      <a16:colId xmlns:a16="http://schemas.microsoft.com/office/drawing/2014/main" val="20004"/>
+                    </a:ext>
+                  </a:extLst>
+                </a:gridCol>
               </a:tblGrid>
               <a:tr h="443484">
                 <a:tc>
@@ -8423,7 +9022,7 @@
                     <a:bodyPr/>
                     <a:lstStyle/>
                     <a:p>
-                      <a:pPr algn="l" indent="0" marL="0">
+                      <a:pPr marL="0" indent="0" algn="l">
                         <a:buNone/>
                       </a:pPr>
                       <a:r>
@@ -8491,7 +9090,7 @@
                     <a:bodyPr/>
                     <a:lstStyle/>
                     <a:p>
-                      <a:pPr algn="ctr" indent="0" marL="0">
+                      <a:pPr marL="0" indent="0" algn="ctr">
                         <a:buNone/>
                       </a:pPr>
                       <a:r>
@@ -8559,7 +9158,7 @@
                     <a:bodyPr/>
                     <a:lstStyle/>
                     <a:p>
-                      <a:pPr algn="ctr" indent="0" marL="0">
+                      <a:pPr marL="0" indent="0" algn="ctr">
                         <a:buNone/>
                       </a:pPr>
                       <a:r>
@@ -8627,7 +9226,7 @@
                     <a:bodyPr/>
                     <a:lstStyle/>
                     <a:p>
-                      <a:pPr algn="ctr" indent="0" marL="0">
+                      <a:pPr marL="0" indent="0" algn="ctr">
                         <a:buNone/>
                       </a:pPr>
                       <a:r>
@@ -8695,7 +9294,7 @@
                     <a:bodyPr/>
                     <a:lstStyle/>
                     <a:p>
-                      <a:pPr algn="ctr" indent="0" marL="0">
+                      <a:pPr marL="0" indent="0" algn="ctr">
                         <a:buNone/>
                       </a:pPr>
                       <a:r>
@@ -8758,6 +9357,11 @@
                     </a:solidFill>
                   </a:tcPr>
                 </a:tc>
+                <a:extLst>
+                  <a:ext uri="{0D108BD9-81ED-4DB2-BD59-A6C34878D82A}">
+                    <a16:rowId xmlns:a16="http://schemas.microsoft.com/office/drawing/2014/main" val="10000"/>
+                  </a:ext>
+                </a:extLst>
               </a:tr>
               <a:tr h="443484">
                 <a:tc>
@@ -8765,7 +9369,7 @@
                     <a:bodyPr/>
                     <a:lstStyle/>
                     <a:p>
-                      <a:pPr algn="l" indent="0" marL="0">
+                      <a:pPr marL="0" indent="0" algn="l">
                         <a:buNone/>
                       </a:pPr>
                       <a:r>
@@ -8833,7 +9437,7 @@
                     <a:bodyPr/>
                     <a:lstStyle/>
                     <a:p>
-                      <a:pPr algn="ctr" indent="0" marL="0">
+                      <a:pPr marL="0" indent="0" algn="ctr">
                         <a:buNone/>
                       </a:pPr>
                       <a:r>
@@ -8901,7 +9505,7 @@
                     <a:bodyPr/>
                     <a:lstStyle/>
                     <a:p>
-                      <a:pPr algn="ctr" indent="0" marL="0">
+                      <a:pPr marL="0" indent="0" algn="ctr">
                         <a:buNone/>
                       </a:pPr>
                       <a:r>
@@ -8969,7 +9573,7 @@
                     <a:bodyPr/>
                     <a:lstStyle/>
                     <a:p>
-                      <a:pPr algn="ctr" indent="0" marL="0">
+                      <a:pPr marL="0" indent="0" algn="ctr">
                         <a:buNone/>
                       </a:pPr>
                       <a:r>
@@ -9037,7 +9641,7 @@
                     <a:bodyPr/>
                     <a:lstStyle/>
                     <a:p>
-                      <a:pPr algn="ctr" indent="0" marL="0">
+                      <a:pPr marL="0" indent="0" algn="ctr">
                         <a:buNone/>
                       </a:pPr>
                       <a:r>
@@ -9100,6 +9704,11 @@
                     </a:solidFill>
                   </a:tcPr>
                 </a:tc>
+                <a:extLst>
+                  <a:ext uri="{0D108BD9-81ED-4DB2-BD59-A6C34878D82A}">
+                    <a16:rowId xmlns:a16="http://schemas.microsoft.com/office/drawing/2014/main" val="10001"/>
+                  </a:ext>
+                </a:extLst>
               </a:tr>
               <a:tr h="443484">
                 <a:tc>
@@ -9107,7 +9716,7 @@
                     <a:bodyPr/>
                     <a:lstStyle/>
                     <a:p>
-                      <a:pPr algn="l" indent="0" marL="0">
+                      <a:pPr marL="0" indent="0" algn="l">
                         <a:buNone/>
                       </a:pPr>
                       <a:r>
@@ -9175,7 +9784,7 @@
                     <a:bodyPr/>
                     <a:lstStyle/>
                     <a:p>
-                      <a:pPr algn="ctr" indent="0" marL="0">
+                      <a:pPr marL="0" indent="0" algn="ctr">
                         <a:buNone/>
                       </a:pPr>
                       <a:r>
@@ -9243,7 +9852,7 @@
                     <a:bodyPr/>
                     <a:lstStyle/>
                     <a:p>
-                      <a:pPr algn="ctr" indent="0" marL="0">
+                      <a:pPr marL="0" indent="0" algn="ctr">
                         <a:buNone/>
                       </a:pPr>
                       <a:r>
@@ -9311,7 +9920,7 @@
                     <a:bodyPr/>
                     <a:lstStyle/>
                     <a:p>
-                      <a:pPr algn="ctr" indent="0" marL="0">
+                      <a:pPr marL="0" indent="0" algn="ctr">
                         <a:buNone/>
                       </a:pPr>
                       <a:r>
@@ -9379,7 +9988,7 @@
                     <a:bodyPr/>
                     <a:lstStyle/>
                     <a:p>
-                      <a:pPr algn="ctr" indent="0" marL="0">
+                      <a:pPr marL="0" indent="0" algn="ctr">
                         <a:buNone/>
                       </a:pPr>
                       <a:r>
@@ -9442,6 +10051,11 @@
                     </a:solidFill>
                   </a:tcPr>
                 </a:tc>
+                <a:extLst>
+                  <a:ext uri="{0D108BD9-81ED-4DB2-BD59-A6C34878D82A}">
+                    <a16:rowId xmlns:a16="http://schemas.microsoft.com/office/drawing/2014/main" val="10002"/>
+                  </a:ext>
+                </a:extLst>
               </a:tr>
               <a:tr h="443484">
                 <a:tc>
@@ -9449,7 +10063,7 @@
                     <a:bodyPr/>
                     <a:lstStyle/>
                     <a:p>
-                      <a:pPr algn="l" indent="0" marL="0">
+                      <a:pPr marL="0" indent="0" algn="l">
                         <a:buNone/>
                       </a:pPr>
                       <a:r>
@@ -9517,7 +10131,7 @@
                     <a:bodyPr/>
                     <a:lstStyle/>
                     <a:p>
-                      <a:pPr algn="ctr" indent="0" marL="0">
+                      <a:pPr marL="0" indent="0" algn="ctr">
                         <a:buNone/>
                       </a:pPr>
                       <a:r>
@@ -9585,7 +10199,7 @@
                     <a:bodyPr/>
                     <a:lstStyle/>
                     <a:p>
-                      <a:pPr algn="ctr" indent="0" marL="0">
+                      <a:pPr marL="0" indent="0" algn="ctr">
                         <a:buNone/>
                       </a:pPr>
                       <a:r>
@@ -9653,7 +10267,7 @@
                     <a:bodyPr/>
                     <a:lstStyle/>
                     <a:p>
-                      <a:pPr algn="ctr" indent="0" marL="0">
+                      <a:pPr marL="0" indent="0" algn="ctr">
                         <a:buNone/>
                       </a:pPr>
                       <a:r>
@@ -9721,7 +10335,7 @@
                     <a:bodyPr/>
                     <a:lstStyle/>
                     <a:p>
-                      <a:pPr algn="ctr" indent="0" marL="0">
+                      <a:pPr marL="0" indent="0" algn="ctr">
                         <a:buNone/>
                       </a:pPr>
                       <a:r>
@@ -9784,6 +10398,11 @@
                     </a:solidFill>
                   </a:tcPr>
                 </a:tc>
+                <a:extLst>
+                  <a:ext uri="{0D108BD9-81ED-4DB2-BD59-A6C34878D82A}">
+                    <a16:rowId xmlns:a16="http://schemas.microsoft.com/office/drawing/2014/main" val="10003"/>
+                  </a:ext>
+                </a:extLst>
               </a:tr>
               <a:tr h="443484">
                 <a:tc>
@@ -9791,7 +10410,7 @@
                     <a:bodyPr/>
                     <a:lstStyle/>
                     <a:p>
-                      <a:pPr algn="l" indent="0" marL="0">
+                      <a:pPr marL="0" indent="0" algn="l">
                         <a:buNone/>
                       </a:pPr>
                       <a:r>
@@ -9859,7 +10478,7 @@
                     <a:bodyPr/>
                     <a:lstStyle/>
                     <a:p>
-                      <a:pPr algn="ctr" indent="0" marL="0">
+                      <a:pPr marL="0" indent="0" algn="ctr">
                         <a:buNone/>
                       </a:pPr>
                       <a:r>
@@ -9927,7 +10546,7 @@
                     <a:bodyPr/>
                     <a:lstStyle/>
                     <a:p>
-                      <a:pPr algn="ctr" indent="0" marL="0">
+                      <a:pPr marL="0" indent="0" algn="ctr">
                         <a:buNone/>
                       </a:pPr>
                       <a:r>
@@ -9995,7 +10614,7 @@
                     <a:bodyPr/>
                     <a:lstStyle/>
                     <a:p>
-                      <a:pPr algn="ctr" indent="0" marL="0">
+                      <a:pPr marL="0" indent="0" algn="ctr">
                         <a:buNone/>
                       </a:pPr>
                       <a:r>
@@ -10063,7 +10682,7 @@
                     <a:bodyPr/>
                     <a:lstStyle/>
                     <a:p>
-                      <a:pPr algn="ctr" indent="0" marL="0">
+                      <a:pPr marL="0" indent="0" algn="ctr">
                         <a:buNone/>
                       </a:pPr>
                       <a:r>
@@ -10126,6 +10745,11 @@
                     </a:solidFill>
                   </a:tcPr>
                 </a:tc>
+                <a:extLst>
+                  <a:ext uri="{0D108BD9-81ED-4DB2-BD59-A6C34878D82A}">
+                    <a16:rowId xmlns:a16="http://schemas.microsoft.com/office/drawing/2014/main" val="10004"/>
+                  </a:ext>
+                </a:extLst>
               </a:tr>
               <a:tr h="443484">
                 <a:tc>
@@ -10133,7 +10757,7 @@
                     <a:bodyPr/>
                     <a:lstStyle/>
                     <a:p>
-                      <a:pPr algn="l" indent="0" marL="0">
+                      <a:pPr marL="0" indent="0" algn="l">
                         <a:buNone/>
                       </a:pPr>
                       <a:r>
@@ -10201,7 +10825,7 @@
                     <a:bodyPr/>
                     <a:lstStyle/>
                     <a:p>
-                      <a:pPr algn="ctr" indent="0" marL="0">
+                      <a:pPr marL="0" indent="0" algn="ctr">
                         <a:buNone/>
                       </a:pPr>
                       <a:r>
@@ -10269,7 +10893,7 @@
                     <a:bodyPr/>
                     <a:lstStyle/>
                     <a:p>
-                      <a:pPr algn="ctr" indent="0" marL="0">
+                      <a:pPr marL="0" indent="0" algn="ctr">
                         <a:buNone/>
                       </a:pPr>
                       <a:r>
@@ -10337,7 +10961,7 @@
                     <a:bodyPr/>
                     <a:lstStyle/>
                     <a:p>
-                      <a:pPr algn="ctr" indent="0" marL="0">
+                      <a:pPr marL="0" indent="0" algn="ctr">
                         <a:buNone/>
                       </a:pPr>
                       <a:r>
@@ -10405,7 +11029,7 @@
                     <a:bodyPr/>
                     <a:lstStyle/>
                     <a:p>
-                      <a:pPr algn="ctr" indent="0" marL="0">
+                      <a:pPr marL="0" indent="0" algn="ctr">
                         <a:buNone/>
                       </a:pPr>
                       <a:r>
@@ -10468,6 +11092,11 @@
                     </a:solidFill>
                   </a:tcPr>
                 </a:tc>
+                <a:extLst>
+                  <a:ext uri="{0D108BD9-81ED-4DB2-BD59-A6C34878D82A}">
+                    <a16:rowId xmlns:a16="http://schemas.microsoft.com/office/drawing/2014/main" val="10005"/>
+                  </a:ext>
+                </a:extLst>
               </a:tr>
               <a:tr h="443484">
                 <a:tc>
@@ -10475,7 +11104,7 @@
                     <a:bodyPr/>
                     <a:lstStyle/>
                     <a:p>
-                      <a:pPr algn="l" indent="0" marL="0">
+                      <a:pPr marL="0" indent="0" algn="l">
                         <a:buNone/>
                       </a:pPr>
                       <a:r>
@@ -10543,7 +11172,7 @@
                     <a:bodyPr/>
                     <a:lstStyle/>
                     <a:p>
-                      <a:pPr algn="ctr" indent="0" marL="0">
+                      <a:pPr marL="0" indent="0" algn="ctr">
                         <a:buNone/>
                       </a:pPr>
                       <a:r>
@@ -10611,7 +11240,7 @@
                     <a:bodyPr/>
                     <a:lstStyle/>
                     <a:p>
-                      <a:pPr algn="ctr" indent="0" marL="0">
+                      <a:pPr marL="0" indent="0" algn="ctr">
                         <a:buNone/>
                       </a:pPr>
                       <a:r>
@@ -10679,7 +11308,7 @@
                     <a:bodyPr/>
                     <a:lstStyle/>
                     <a:p>
-                      <a:pPr algn="ctr" indent="0" marL="0">
+                      <a:pPr marL="0" indent="0" algn="ctr">
                         <a:buNone/>
                       </a:pPr>
                       <a:r>
@@ -10747,7 +11376,7 @@
                     <a:bodyPr/>
                     <a:lstStyle/>
                     <a:p>
-                      <a:pPr algn="ctr" indent="0" marL="0">
+                      <a:pPr marL="0" indent="0" algn="ctr">
                         <a:buNone/>
                       </a:pPr>
                       <a:r>
@@ -10810,6 +11439,11 @@
                     </a:solidFill>
                   </a:tcPr>
                 </a:tc>
+                <a:extLst>
+                  <a:ext uri="{0D108BD9-81ED-4DB2-BD59-A6C34878D82A}">
+                    <a16:rowId xmlns:a16="http://schemas.microsoft.com/office/drawing/2014/main" val="10006"/>
+                  </a:ext>
+                </a:extLst>
               </a:tr>
             </a:tbl>
           </a:graphicData>
@@ -10817,7 +11451,7 @@
       </p:graphicFrame>
       <p:sp>
         <p:nvSpPr>
-          <p:cNvPr id="5" name="Text 2"/>
+          <p:cNvPr id="4" name="Text 2"/>
           <p:cNvSpPr/>
           <p:nvPr/>
         </p:nvSpPr>
@@ -10836,7 +11470,7 @@
           <a:bodyPr wrap="square" rtlCol="0" anchor="ctr"/>
           <a:lstStyle/>
           <a:p>
-            <a:pPr algn="ctr" indent="0" marL="0">
+            <a:pPr marL="0" indent="0" algn="ctr">
               <a:buNone/>
             </a:pPr>
             <a:r>
@@ -10870,6 +11504,7 @@
         <a:solidFill>
           <a:srgbClr val="EDF4E8"/>
         </a:solidFill>
+        <a:effectLst/>
       </p:bgPr>
     </p:bg>
     <p:spTree>
@@ -10907,7 +11542,7 @@
           <a:bodyPr wrap="square" lIns="0" tIns="0" rIns="0" bIns="0" rtlCol="0" anchor="ctr"/>
           <a:lstStyle/>
           <a:p>
-            <a:pPr algn="l" indent="0" marL="0">
+            <a:pPr marL="0" indent="0" algn="l">
               <a:buNone/>
             </a:pPr>
             <a:r>
@@ -10949,6 +11584,13 @@
             <a:prstDash val="solid"/>
           </a:ln>
         </p:spPr>
+        <p:txBody>
+          <a:bodyPr/>
+          <a:lstStyle/>
+          <a:p>
+            <a:endParaRPr lang="en-GB"/>
+          </a:p>
+        </p:txBody>
       </p:sp>
       <p:sp>
         <p:nvSpPr>
@@ -10974,13 +11616,20 @@
             <a:prstDash val="solid"/>
           </a:ln>
           <a:effectLst>
-            <a:outerShdw sx="100000" sy="100000" kx="0" ky="0" algn="bl" rotWithShape="0" blurRad="63500" dist="25400" dir="8100000">
+            <a:outerShdw blurRad="63500" dist="25400" dir="8100000" algn="bl" rotWithShape="0">
               <a:srgbClr val="000000">
                 <a:alpha val="10000"/>
               </a:srgbClr>
             </a:outerShdw>
           </a:effectLst>
         </p:spPr>
+        <p:txBody>
+          <a:bodyPr/>
+          <a:lstStyle/>
+          <a:p>
+            <a:endParaRPr lang="en-GB"/>
+          </a:p>
+        </p:txBody>
       </p:sp>
       <p:sp>
         <p:nvSpPr>
@@ -11006,6 +11655,13 @@
             <a:prstDash val="solid"/>
           </a:ln>
         </p:spPr>
+        <p:txBody>
+          <a:bodyPr/>
+          <a:lstStyle/>
+          <a:p>
+            <a:endParaRPr lang="en-GB"/>
+          </a:p>
+        </p:txBody>
       </p:sp>
       <p:sp>
         <p:nvSpPr>
@@ -11028,7 +11684,7 @@
           <a:bodyPr wrap="square" lIns="0" tIns="0" rIns="0" bIns="0" rtlCol="0" anchor="ctr"/>
           <a:lstStyle/>
           <a:p>
-            <a:pPr algn="ctr" indent="0" marL="0">
+            <a:pPr marL="0" indent="0" algn="ctr">
               <a:buNone/>
             </a:pPr>
             <a:r>
@@ -11067,7 +11723,7 @@
           <a:bodyPr wrap="square" lIns="0" tIns="0" rIns="0" bIns="0" rtlCol="0" anchor="ctr"/>
           <a:lstStyle/>
           <a:p>
-            <a:pPr indent="0" marL="0">
+            <a:pPr marL="0" indent="0">
               <a:buNone/>
             </a:pPr>
             <a:r>
@@ -11106,7 +11762,7 @@
           <a:bodyPr wrap="square" lIns="0" tIns="0" rIns="0" bIns="0" rtlCol="0" anchor="ctr"/>
           <a:lstStyle/>
           <a:p>
-            <a:pPr indent="0" marL="0">
+            <a:pPr marL="0" indent="0">
               <a:buNone/>
             </a:pPr>
             <a:r>
@@ -11145,7 +11801,7 @@
           <a:bodyPr wrap="square" rtlCol="0" anchor="t"/>
           <a:lstStyle/>
           <a:p>
-            <a:pPr indent="0" marL="0">
+            <a:pPr marL="0" indent="0">
               <a:buNone/>
             </a:pPr>
             <a:r>
@@ -11187,13 +11843,20 @@
             <a:prstDash val="solid"/>
           </a:ln>
           <a:effectLst>
-            <a:outerShdw sx="100000" sy="100000" kx="0" ky="0" algn="bl" rotWithShape="0" blurRad="63500" dist="25400" dir="8100000">
+            <a:outerShdw blurRad="63500" dist="25400" dir="8100000" algn="bl" rotWithShape="0">
               <a:srgbClr val="000000">
                 <a:alpha val="10000"/>
               </a:srgbClr>
             </a:outerShdw>
           </a:effectLst>
         </p:spPr>
+        <p:txBody>
+          <a:bodyPr/>
+          <a:lstStyle/>
+          <a:p>
+            <a:endParaRPr lang="en-GB"/>
+          </a:p>
+        </p:txBody>
       </p:sp>
       <p:sp>
         <p:nvSpPr>
@@ -11219,6 +11882,13 @@
             <a:prstDash val="solid"/>
           </a:ln>
         </p:spPr>
+        <p:txBody>
+          <a:bodyPr/>
+          <a:lstStyle/>
+          <a:p>
+            <a:endParaRPr lang="en-GB"/>
+          </a:p>
+        </p:txBody>
       </p:sp>
       <p:sp>
         <p:nvSpPr>
@@ -11241,7 +11911,7 @@
           <a:bodyPr wrap="square" lIns="0" tIns="0" rIns="0" bIns="0" rtlCol="0" anchor="ctr"/>
           <a:lstStyle/>
           <a:p>
-            <a:pPr algn="ctr" indent="0" marL="0">
+            <a:pPr marL="0" indent="0" algn="ctr">
               <a:buNone/>
             </a:pPr>
             <a:r>
@@ -11280,7 +11950,7 @@
           <a:bodyPr wrap="square" lIns="0" tIns="0" rIns="0" bIns="0" rtlCol="0" anchor="ctr"/>
           <a:lstStyle/>
           <a:p>
-            <a:pPr indent="0" marL="0">
+            <a:pPr marL="0" indent="0">
               <a:buNone/>
             </a:pPr>
             <a:r>
@@ -11319,7 +11989,7 @@
           <a:bodyPr wrap="square" lIns="0" tIns="0" rIns="0" bIns="0" rtlCol="0" anchor="ctr"/>
           <a:lstStyle/>
           <a:p>
-            <a:pPr indent="0" marL="0">
+            <a:pPr marL="0" indent="0">
               <a:buNone/>
             </a:pPr>
             <a:r>
@@ -11358,7 +12028,7 @@
           <a:bodyPr wrap="square" rtlCol="0" anchor="t"/>
           <a:lstStyle/>
           <a:p>
-            <a:pPr indent="0" marL="0">
+            <a:pPr marL="0" indent="0">
               <a:buNone/>
             </a:pPr>
             <a:r>
@@ -11400,13 +12070,20 @@
             <a:prstDash val="solid"/>
           </a:ln>
           <a:effectLst>
-            <a:outerShdw sx="100000" sy="100000" kx="0" ky="0" algn="bl" rotWithShape="0" blurRad="63500" dist="25400" dir="8100000">
+            <a:outerShdw blurRad="63500" dist="25400" dir="8100000" algn="bl" rotWithShape="0">
               <a:srgbClr val="000000">
                 <a:alpha val="10000"/>
               </a:srgbClr>
             </a:outerShdw>
           </a:effectLst>
         </p:spPr>
+        <p:txBody>
+          <a:bodyPr/>
+          <a:lstStyle/>
+          <a:p>
+            <a:endParaRPr lang="en-GB"/>
+          </a:p>
+        </p:txBody>
       </p:sp>
       <p:sp>
         <p:nvSpPr>
@@ -11432,6 +12109,13 @@
             <a:prstDash val="solid"/>
           </a:ln>
         </p:spPr>
+        <p:txBody>
+          <a:bodyPr/>
+          <a:lstStyle/>
+          <a:p>
+            <a:endParaRPr lang="en-GB"/>
+          </a:p>
+        </p:txBody>
       </p:sp>
       <p:sp>
         <p:nvSpPr>
@@ -11454,7 +12138,7 @@
           <a:bodyPr wrap="square" lIns="0" tIns="0" rIns="0" bIns="0" rtlCol="0" anchor="ctr"/>
           <a:lstStyle/>
           <a:p>
-            <a:pPr algn="ctr" indent="0" marL="0">
+            <a:pPr marL="0" indent="0" algn="ctr">
               <a:buNone/>
             </a:pPr>
             <a:r>
@@ -11493,7 +12177,7 @@
           <a:bodyPr wrap="square" lIns="0" tIns="0" rIns="0" bIns="0" rtlCol="0" anchor="ctr"/>
           <a:lstStyle/>
           <a:p>
-            <a:pPr indent="0" marL="0">
+            <a:pPr marL="0" indent="0">
               <a:buNone/>
             </a:pPr>
             <a:r>
@@ -11532,7 +12216,7 @@
           <a:bodyPr wrap="square" lIns="0" tIns="0" rIns="0" bIns="0" rtlCol="0" anchor="ctr"/>
           <a:lstStyle/>
           <a:p>
-            <a:pPr indent="0" marL="0">
+            <a:pPr marL="0" indent="0">
               <a:buNone/>
             </a:pPr>
             <a:r>
@@ -11571,7 +12255,7 @@
           <a:bodyPr wrap="square" rtlCol="0" anchor="t"/>
           <a:lstStyle/>
           <a:p>
-            <a:pPr indent="0" marL="0">
+            <a:pPr marL="0" indent="0">
               <a:buNone/>
             </a:pPr>
             <a:r>
@@ -11613,13 +12297,20 @@
             <a:prstDash val="solid"/>
           </a:ln>
           <a:effectLst>
-            <a:outerShdw sx="100000" sy="100000" kx="0" ky="0" algn="bl" rotWithShape="0" blurRad="63500" dist="25400" dir="8100000">
+            <a:outerShdw blurRad="63500" dist="25400" dir="8100000" algn="bl" rotWithShape="0">
               <a:srgbClr val="000000">
                 <a:alpha val="10000"/>
               </a:srgbClr>
             </a:outerShdw>
           </a:effectLst>
         </p:spPr>
+        <p:txBody>
+          <a:bodyPr/>
+          <a:lstStyle/>
+          <a:p>
+            <a:endParaRPr lang="en-GB"/>
+          </a:p>
+        </p:txBody>
       </p:sp>
       <p:sp>
         <p:nvSpPr>
@@ -11645,6 +12336,13 @@
             <a:prstDash val="solid"/>
           </a:ln>
         </p:spPr>
+        <p:txBody>
+          <a:bodyPr/>
+          <a:lstStyle/>
+          <a:p>
+            <a:endParaRPr lang="en-GB"/>
+          </a:p>
+        </p:txBody>
       </p:sp>
       <p:sp>
         <p:nvSpPr>
@@ -11667,7 +12365,7 @@
           <a:bodyPr wrap="square" lIns="0" tIns="0" rIns="0" bIns="0" rtlCol="0" anchor="ctr"/>
           <a:lstStyle/>
           <a:p>
-            <a:pPr algn="ctr" indent="0" marL="0">
+            <a:pPr marL="0" indent="0" algn="ctr">
               <a:buNone/>
             </a:pPr>
             <a:r>
@@ -11706,7 +12404,7 @@
           <a:bodyPr wrap="square" lIns="0" tIns="0" rIns="0" bIns="0" rtlCol="0" anchor="ctr"/>
           <a:lstStyle/>
           <a:p>
-            <a:pPr indent="0" marL="0">
+            <a:pPr marL="0" indent="0">
               <a:buNone/>
             </a:pPr>
             <a:r>
@@ -11745,7 +12443,7 @@
           <a:bodyPr wrap="square" lIns="0" tIns="0" rIns="0" bIns="0" rtlCol="0" anchor="ctr"/>
           <a:lstStyle/>
           <a:p>
-            <a:pPr indent="0" marL="0">
+            <a:pPr marL="0" indent="0">
               <a:buNone/>
             </a:pPr>
             <a:r>
@@ -11784,7 +12482,7 @@
           <a:bodyPr wrap="square" rtlCol="0" anchor="t"/>
           <a:lstStyle/>
           <a:p>
-            <a:pPr indent="0" marL="0">
+            <a:pPr marL="0" indent="0">
               <a:buNone/>
             </a:pPr>
             <a:r>
@@ -11823,7 +12521,7 @@
           <a:bodyPr wrap="square" rtlCol="0" anchor="ctr"/>
           <a:lstStyle/>
           <a:p>
-            <a:pPr indent="0" marL="0">
+            <a:pPr marL="0" indent="0">
               <a:buNone/>
             </a:pPr>
             <a:r>
@@ -11857,6 +12555,7 @@
         <a:solidFill>
           <a:srgbClr val="EDF4E8"/>
         </a:solidFill>
+        <a:effectLst/>
       </p:bgPr>
     </p:bg>
     <p:spTree>
@@ -11894,7 +12593,7 @@
           <a:bodyPr wrap="square" lIns="0" tIns="0" rIns="0" bIns="0" rtlCol="0" anchor="ctr"/>
           <a:lstStyle/>
           <a:p>
-            <a:pPr algn="l" indent="0" marL="0">
+            <a:pPr marL="0" indent="0" algn="l">
               <a:buNone/>
             </a:pPr>
             <a:r>
@@ -11936,6 +12635,13 @@
             <a:prstDash val="solid"/>
           </a:ln>
         </p:spPr>
+        <p:txBody>
+          <a:bodyPr/>
+          <a:lstStyle/>
+          <a:p>
+            <a:endParaRPr lang="en-GB"/>
+          </a:p>
+        </p:txBody>
       </p:sp>
       <p:sp>
         <p:nvSpPr>
@@ -11961,13 +12667,20 @@
             <a:prstDash val="solid"/>
           </a:ln>
           <a:effectLst>
-            <a:outerShdw sx="100000" sy="100000" kx="0" ky="0" algn="bl" rotWithShape="0" blurRad="63500" dist="25400" dir="8100000">
+            <a:outerShdw blurRad="63500" dist="25400" dir="8100000" algn="bl" rotWithShape="0">
               <a:srgbClr val="000000">
                 <a:alpha val="10000"/>
               </a:srgbClr>
             </a:outerShdw>
           </a:effectLst>
         </p:spPr>
+        <p:txBody>
+          <a:bodyPr/>
+          <a:lstStyle/>
+          <a:p>
+            <a:endParaRPr lang="en-GB"/>
+          </a:p>
+        </p:txBody>
       </p:sp>
       <p:sp>
         <p:nvSpPr>
@@ -11993,6 +12706,13 @@
             <a:prstDash val="solid"/>
           </a:ln>
         </p:spPr>
+        <p:txBody>
+          <a:bodyPr/>
+          <a:lstStyle/>
+          <a:p>
+            <a:endParaRPr lang="en-GB"/>
+          </a:p>
+        </p:txBody>
       </p:sp>
       <p:sp>
         <p:nvSpPr>
@@ -12015,7 +12735,7 @@
           <a:bodyPr wrap="square" lIns="0" tIns="0" rIns="0" bIns="0" rtlCol="0" anchor="ctr"/>
           <a:lstStyle/>
           <a:p>
-            <a:pPr algn="ctr" indent="0" marL="0">
+            <a:pPr marL="0" indent="0" algn="ctr">
               <a:buNone/>
             </a:pPr>
             <a:r>
@@ -12054,7 +12774,7 @@
           <a:bodyPr wrap="square" rtlCol="0" anchor="ctr"/>
           <a:lstStyle/>
           <a:p>
-            <a:pPr indent="0" marL="0">
+            <a:pPr marL="0" indent="0">
               <a:buNone/>
             </a:pPr>
             <a:r>
@@ -12094,6 +12814,13 @@
             <a:prstDash val="solid"/>
           </a:ln>
         </p:spPr>
+        <p:txBody>
+          <a:bodyPr/>
+          <a:lstStyle/>
+          <a:p>
+            <a:endParaRPr lang="en-GB"/>
+          </a:p>
+        </p:txBody>
       </p:sp>
       <p:sp>
         <p:nvSpPr>
@@ -12116,7 +12843,7 @@
           <a:bodyPr wrap="square" rtlCol="0" anchor="ctr"/>
           <a:lstStyle/>
           <a:p>
-            <a:pPr indent="0" marL="0">
+            <a:pPr marL="0" indent="0">
               <a:buNone/>
             </a:pPr>
             <a:r>
@@ -12156,6 +12883,13 @@
             <a:prstDash val="solid"/>
           </a:ln>
         </p:spPr>
+        <p:txBody>
+          <a:bodyPr/>
+          <a:lstStyle/>
+          <a:p>
+            <a:endParaRPr lang="en-GB"/>
+          </a:p>
+        </p:txBody>
       </p:sp>
       <p:sp>
         <p:nvSpPr>
@@ -12178,7 +12912,7 @@
           <a:bodyPr wrap="square" rtlCol="0" anchor="ctr"/>
           <a:lstStyle/>
           <a:p>
-            <a:pPr indent="0" marL="0">
+            <a:pPr marL="0" indent="0">
               <a:buNone/>
             </a:pPr>
             <a:r>
@@ -12218,6 +12952,13 @@
             <a:prstDash val="solid"/>
           </a:ln>
         </p:spPr>
+        <p:txBody>
+          <a:bodyPr/>
+          <a:lstStyle/>
+          <a:p>
+            <a:endParaRPr lang="en-GB"/>
+          </a:p>
+        </p:txBody>
       </p:sp>
       <p:sp>
         <p:nvSpPr>
@@ -12240,7 +12981,7 @@
           <a:bodyPr wrap="square" rtlCol="0" anchor="ctr"/>
           <a:lstStyle/>
           <a:p>
-            <a:pPr indent="0" marL="0">
+            <a:pPr marL="0" indent="0">
               <a:buNone/>
             </a:pPr>
             <a:r>
@@ -12282,13 +13023,20 @@
             <a:prstDash val="solid"/>
           </a:ln>
           <a:effectLst>
-            <a:outerShdw sx="100000" sy="100000" kx="0" ky="0" algn="bl" rotWithShape="0" blurRad="63500" dist="25400" dir="8100000">
+            <a:outerShdw blurRad="63500" dist="25400" dir="8100000" algn="bl" rotWithShape="0">
               <a:srgbClr val="000000">
                 <a:alpha val="10000"/>
               </a:srgbClr>
             </a:outerShdw>
           </a:effectLst>
         </p:spPr>
+        <p:txBody>
+          <a:bodyPr/>
+          <a:lstStyle/>
+          <a:p>
+            <a:endParaRPr lang="en-GB"/>
+          </a:p>
+        </p:txBody>
       </p:sp>
       <p:sp>
         <p:nvSpPr>
@@ -12314,6 +13062,13 @@
             <a:prstDash val="solid"/>
           </a:ln>
         </p:spPr>
+        <p:txBody>
+          <a:bodyPr/>
+          <a:lstStyle/>
+          <a:p>
+            <a:endParaRPr lang="en-GB"/>
+          </a:p>
+        </p:txBody>
       </p:sp>
       <p:sp>
         <p:nvSpPr>
@@ -12336,7 +13091,7 @@
           <a:bodyPr wrap="square" lIns="0" tIns="0" rIns="0" bIns="0" rtlCol="0" anchor="ctr"/>
           <a:lstStyle/>
           <a:p>
-            <a:pPr algn="ctr" indent="0" marL="0">
+            <a:pPr marL="0" indent="0" algn="ctr">
               <a:buNone/>
             </a:pPr>
             <a:r>
@@ -12375,7 +13130,7 @@
           <a:bodyPr wrap="square" rtlCol="0" anchor="ctr"/>
           <a:lstStyle/>
           <a:p>
-            <a:pPr indent="0" marL="0">
+            <a:pPr marL="0" indent="0">
               <a:buNone/>
             </a:pPr>
             <a:r>
@@ -12415,6 +13170,13 @@
             <a:prstDash val="solid"/>
           </a:ln>
         </p:spPr>
+        <p:txBody>
+          <a:bodyPr/>
+          <a:lstStyle/>
+          <a:p>
+            <a:endParaRPr lang="en-GB"/>
+          </a:p>
+        </p:txBody>
       </p:sp>
       <p:sp>
         <p:nvSpPr>
@@ -12437,7 +13199,7 @@
           <a:bodyPr wrap="square" rtlCol="0" anchor="ctr"/>
           <a:lstStyle/>
           <a:p>
-            <a:pPr indent="0" marL="0">
+            <a:pPr marL="0" indent="0">
               <a:buNone/>
             </a:pPr>
             <a:r>
@@ -12479,13 +13241,20 @@
             <a:prstDash val="solid"/>
           </a:ln>
           <a:effectLst>
-            <a:outerShdw sx="100000" sy="100000" kx="0" ky="0" algn="bl" rotWithShape="0" blurRad="63500" dist="25400" dir="8100000">
+            <a:outerShdw blurRad="63500" dist="25400" dir="8100000" algn="bl" rotWithShape="0">
               <a:srgbClr val="000000">
                 <a:alpha val="10000"/>
               </a:srgbClr>
             </a:outerShdw>
           </a:effectLst>
         </p:spPr>
+        <p:txBody>
+          <a:bodyPr/>
+          <a:lstStyle/>
+          <a:p>
+            <a:endParaRPr lang="en-GB"/>
+          </a:p>
+        </p:txBody>
       </p:sp>
       <p:sp>
         <p:nvSpPr>
@@ -12511,6 +13280,13 @@
             <a:prstDash val="solid"/>
           </a:ln>
         </p:spPr>
+        <p:txBody>
+          <a:bodyPr/>
+          <a:lstStyle/>
+          <a:p>
+            <a:endParaRPr lang="en-GB"/>
+          </a:p>
+        </p:txBody>
       </p:sp>
       <p:sp>
         <p:nvSpPr>
@@ -12533,7 +13309,7 @@
           <a:bodyPr wrap="square" lIns="0" tIns="0" rIns="0" bIns="0" rtlCol="0" anchor="ctr"/>
           <a:lstStyle/>
           <a:p>
-            <a:pPr algn="ctr" indent="0" marL="0">
+            <a:pPr marL="0" indent="0" algn="ctr">
               <a:buNone/>
             </a:pPr>
             <a:r>
@@ -12572,7 +13348,7 @@
           <a:bodyPr wrap="square" rtlCol="0" anchor="ctr"/>
           <a:lstStyle/>
           <a:p>
-            <a:pPr indent="0" marL="0">
+            <a:pPr marL="0" indent="0">
               <a:buNone/>
             </a:pPr>
             <a:r>
@@ -12612,6 +13388,13 @@
             <a:prstDash val="solid"/>
           </a:ln>
         </p:spPr>
+        <p:txBody>
+          <a:bodyPr/>
+          <a:lstStyle/>
+          <a:p>
+            <a:endParaRPr lang="en-GB"/>
+          </a:p>
+        </p:txBody>
       </p:sp>
       <p:sp>
         <p:nvSpPr>
@@ -12634,7 +13417,7 @@
           <a:bodyPr wrap="square" rtlCol="0" anchor="ctr"/>
           <a:lstStyle/>
           <a:p>
-            <a:pPr indent="0" marL="0">
+            <a:pPr marL="0" indent="0">
               <a:buNone/>
             </a:pPr>
             <a:r>
@@ -12674,6 +13457,13 @@
             <a:prstDash val="solid"/>
           </a:ln>
         </p:spPr>
+        <p:txBody>
+          <a:bodyPr/>
+          <a:lstStyle/>
+          <a:p>
+            <a:endParaRPr lang="en-GB"/>
+          </a:p>
+        </p:txBody>
       </p:sp>
       <p:sp>
         <p:nvSpPr>
@@ -12697,6 +13487,13 @@
             <a:prstDash val="solid"/>
           </a:ln>
         </p:spPr>
+        <p:txBody>
+          <a:bodyPr/>
+          <a:lstStyle/>
+          <a:p>
+            <a:endParaRPr lang="en-GB"/>
+          </a:p>
+        </p:txBody>
       </p:sp>
       <p:sp>
         <p:nvSpPr>
@@ -12719,7 +13516,7 @@
           <a:bodyPr wrap="square" rtlCol="0" anchor="ctr"/>
           <a:lstStyle/>
           <a:p>
-            <a:pPr algn="ctr" indent="0" marL="0">
+            <a:pPr marL="0" indent="0" algn="ctr">
               <a:buNone/>
             </a:pPr>
             <a:r>
@@ -12758,7 +13555,7 @@
           <a:bodyPr wrap="square" rtlCol="0" anchor="ctr"/>
           <a:lstStyle/>
           <a:p>
-            <a:pPr algn="ctr" indent="0" marL="0">
+            <a:pPr marL="0" indent="0" algn="ctr">
               <a:buNone/>
             </a:pPr>
             <a:r>
@@ -12800,13 +13597,20 @@
             <a:prstDash val="solid"/>
           </a:ln>
           <a:effectLst>
-            <a:outerShdw sx="100000" sy="100000" kx="0" ky="0" algn="bl" rotWithShape="0" blurRad="63500" dist="25400" dir="8100000">
+            <a:outerShdw blurRad="63500" dist="25400" dir="8100000" algn="bl" rotWithShape="0">
               <a:srgbClr val="000000">
                 <a:alpha val="10000"/>
               </a:srgbClr>
             </a:outerShdw>
           </a:effectLst>
         </p:spPr>
+        <p:txBody>
+          <a:bodyPr/>
+          <a:lstStyle/>
+          <a:p>
+            <a:endParaRPr lang="en-GB"/>
+          </a:p>
+        </p:txBody>
       </p:sp>
       <p:sp>
         <p:nvSpPr>
@@ -12829,7 +13633,7 @@
           <a:bodyPr wrap="square" rtlCol="0" anchor="ctr"/>
           <a:lstStyle/>
           <a:p>
-            <a:pPr indent="0" marL="0">
+            <a:pPr marL="0" indent="0">
               <a:buNone/>
             </a:pPr>
             <a:r>
@@ -12843,9 +13647,6 @@
               </a:rPr>
               <a:t>ManyToManyField</a:t>
             </a:r>
-            <a:pPr indent="0" marL="0">
-              <a:buNone/>
-            </a:pPr>
             <a:r>
               <a:rPr lang="en-US" sz="1150" dirty="0">
                 <a:solidFill>
@@ -12857,9 +13658,6 @@
               </a:rPr>
               <a:t> в Django автоматически создаёт промежуточную таблицу. Один ингредиент «Соль» связан с неограниченным числом рецептов </a:t>
             </a:r>
-            <a:pPr indent="0" marL="0">
-              <a:buNone/>
-            </a:pPr>
             <a:r>
               <a:rPr lang="en-US" sz="1150" b="1" dirty="0">
                 <a:solidFill>
@@ -12871,9 +13669,6 @@
               </a:rPr>
               <a:t>без дублирования данных</a:t>
             </a:r>
-            <a:pPr indent="0" marL="0">
-              <a:buNone/>
-            </a:pPr>
             <a:r>
               <a:rPr lang="en-US" sz="1150" dirty="0">
                 <a:solidFill>
@@ -12885,9 +13680,6 @@
               </a:rPr>
               <a:t>. Django ORM обеспечивает двустороннюю навигацию: </a:t>
             </a:r>
-            <a:pPr indent="0" marL="0">
-              <a:buNone/>
-            </a:pPr>
             <a:r>
               <a:rPr lang="en-US" sz="1150" dirty="0">
                 <a:solidFill>
@@ -12899,9 +13691,6 @@
               </a:rPr>
               <a:t>recipe.ingredients.all()</a:t>
             </a:r>
-            <a:pPr indent="0" marL="0">
-              <a:buNone/>
-            </a:pPr>
             <a:r>
               <a:rPr lang="en-US" sz="1150" dirty="0">
                 <a:solidFill>
@@ -12913,9 +13702,6 @@
               </a:rPr>
               <a:t> и </a:t>
             </a:r>
-            <a:pPr indent="0" marL="0">
-              <a:buNone/>
-            </a:pPr>
             <a:r>
               <a:rPr lang="en-US" sz="1150" dirty="0">
                 <a:solidFill>
@@ -12927,9 +13713,6 @@
               </a:rPr>
               <a:t>ingredient.recipes.all()</a:t>
             </a:r>
-            <a:pPr indent="0" marL="0">
-              <a:buNone/>
-            </a:pPr>
             <a:r>
               <a:rPr lang="en-US" sz="1150" dirty="0">
                 <a:solidFill>
@@ -12961,6 +13744,7 @@
         <a:solidFill>
           <a:srgbClr val="EDF4E8"/>
         </a:solidFill>
+        <a:effectLst/>
       </p:bgPr>
     </p:bg>
     <p:spTree>
@@ -12998,7 +13782,7 @@
           <a:bodyPr wrap="square" lIns="0" tIns="0" rIns="0" bIns="0" rtlCol="0" anchor="ctr"/>
           <a:lstStyle/>
           <a:p>
-            <a:pPr algn="l" indent="0" marL="0">
+            <a:pPr marL="0" indent="0" algn="l">
               <a:buNone/>
             </a:pPr>
             <a:r>
@@ -13040,6 +13824,13 @@
             <a:prstDash val="solid"/>
           </a:ln>
         </p:spPr>
+        <p:txBody>
+          <a:bodyPr/>
+          <a:lstStyle/>
+          <a:p>
+            <a:endParaRPr lang="en-GB"/>
+          </a:p>
+        </p:txBody>
       </p:sp>
       <p:sp>
         <p:nvSpPr>
@@ -13065,13 +13856,20 @@
             <a:prstDash val="solid"/>
           </a:ln>
           <a:effectLst>
-            <a:outerShdw sx="100000" sy="100000" kx="0" ky="0" algn="bl" rotWithShape="0" blurRad="63500" dist="25400" dir="8100000">
+            <a:outerShdw blurRad="63500" dist="25400" dir="8100000" algn="bl" rotWithShape="0">
               <a:srgbClr val="000000">
                 <a:alpha val="10000"/>
               </a:srgbClr>
             </a:outerShdw>
           </a:effectLst>
         </p:spPr>
+        <p:txBody>
+          <a:bodyPr/>
+          <a:lstStyle/>
+          <a:p>
+            <a:endParaRPr lang="en-GB"/>
+          </a:p>
+        </p:txBody>
       </p:sp>
       <p:sp>
         <p:nvSpPr>
@@ -13097,6 +13895,13 @@
             <a:prstDash val="solid"/>
           </a:ln>
         </p:spPr>
+        <p:txBody>
+          <a:bodyPr/>
+          <a:lstStyle/>
+          <a:p>
+            <a:endParaRPr lang="en-GB"/>
+          </a:p>
+        </p:txBody>
       </p:sp>
       <p:sp>
         <p:nvSpPr>
@@ -13119,7 +13924,7 @@
           <a:bodyPr wrap="square" lIns="0" tIns="0" rIns="0" bIns="0" rtlCol="0" anchor="ctr"/>
           <a:lstStyle/>
           <a:p>
-            <a:pPr algn="ctr" indent="0" marL="0">
+            <a:pPr marL="0" indent="0" algn="ctr">
               <a:buNone/>
             </a:pPr>
             <a:r>
@@ -13158,7 +13963,7 @@
           <a:bodyPr wrap="square" rtlCol="0" anchor="ctr"/>
           <a:lstStyle/>
           <a:p>
-            <a:pPr algn="ctr" indent="0" marL="0">
+            <a:pPr marL="0" indent="0" algn="ctr">
               <a:buNone/>
             </a:pPr>
             <a:r>
@@ -13197,7 +14002,7 @@
           <a:bodyPr wrap="square" rtlCol="0" anchor="ctr"/>
           <a:lstStyle/>
           <a:p>
-            <a:pPr indent="0" marL="0">
+            <a:pPr marL="0" indent="0">
               <a:buNone/>
             </a:pPr>
             <a:r>
@@ -13214,13 +14019,13 @@
             <a:endParaRPr lang="en-US" sz="1100" dirty="0"/>
           </a:p>
           <a:p>
-            <a:pPr indent="0" marL="0">
+            <a:pPr marL="0" indent="0">
               <a:buNone/>
             </a:pPr>
             <a:endParaRPr lang="en-US" sz="1100" dirty="0"/>
           </a:p>
           <a:p>
-            <a:pPr indent="0" marL="0">
+            <a:pPr marL="0" indent="0">
               <a:buNone/>
             </a:pPr>
             <a:r>
@@ -13262,13 +14067,20 @@
             <a:prstDash val="solid"/>
           </a:ln>
           <a:effectLst>
-            <a:outerShdw sx="100000" sy="100000" kx="0" ky="0" algn="bl" rotWithShape="0" blurRad="63500" dist="25400" dir="8100000">
+            <a:outerShdw blurRad="63500" dist="25400" dir="8100000" algn="bl" rotWithShape="0">
               <a:srgbClr val="000000">
                 <a:alpha val="10000"/>
               </a:srgbClr>
             </a:outerShdw>
           </a:effectLst>
         </p:spPr>
+        <p:txBody>
+          <a:bodyPr/>
+          <a:lstStyle/>
+          <a:p>
+            <a:endParaRPr lang="en-GB"/>
+          </a:p>
+        </p:txBody>
       </p:sp>
       <p:sp>
         <p:nvSpPr>
@@ -13294,6 +14106,13 @@
             <a:prstDash val="solid"/>
           </a:ln>
         </p:spPr>
+        <p:txBody>
+          <a:bodyPr/>
+          <a:lstStyle/>
+          <a:p>
+            <a:endParaRPr lang="en-GB"/>
+          </a:p>
+        </p:txBody>
       </p:sp>
       <p:sp>
         <p:nvSpPr>
@@ -13316,7 +14135,7 @@
           <a:bodyPr wrap="square" lIns="0" tIns="0" rIns="0" bIns="0" rtlCol="0" anchor="ctr"/>
           <a:lstStyle/>
           <a:p>
-            <a:pPr algn="ctr" indent="0" marL="0">
+            <a:pPr marL="0" indent="0" algn="ctr">
               <a:buNone/>
             </a:pPr>
             <a:r>
@@ -13355,7 +14174,7 @@
           <a:bodyPr wrap="square" rtlCol="0" anchor="ctr"/>
           <a:lstStyle/>
           <a:p>
-            <a:pPr algn="ctr" indent="0" marL="0">
+            <a:pPr marL="0" indent="0" algn="ctr">
               <a:buNone/>
             </a:pPr>
             <a:r>
@@ -13394,7 +14213,7 @@
           <a:bodyPr wrap="square" rtlCol="0" anchor="ctr"/>
           <a:lstStyle/>
           <a:p>
-            <a:pPr indent="0" marL="0">
+            <a:pPr marL="0" indent="0">
               <a:buNone/>
             </a:pPr>
             <a:r>
@@ -13411,13 +14230,13 @@
             <a:endParaRPr lang="en-US" sz="1100" dirty="0"/>
           </a:p>
           <a:p>
-            <a:pPr indent="0" marL="0">
+            <a:pPr marL="0" indent="0">
               <a:buNone/>
             </a:pPr>
             <a:endParaRPr lang="en-US" sz="1100" dirty="0"/>
           </a:p>
           <a:p>
-            <a:pPr indent="0" marL="0">
+            <a:pPr marL="0" indent="0">
               <a:buNone/>
             </a:pPr>
             <a:r>
@@ -13459,13 +14278,20 @@
             <a:prstDash val="solid"/>
           </a:ln>
           <a:effectLst>
-            <a:outerShdw sx="100000" sy="100000" kx="0" ky="0" algn="bl" rotWithShape="0" blurRad="63500" dist="25400" dir="8100000">
+            <a:outerShdw blurRad="63500" dist="25400" dir="8100000" algn="bl" rotWithShape="0">
               <a:srgbClr val="000000">
                 <a:alpha val="10000"/>
               </a:srgbClr>
             </a:outerShdw>
           </a:effectLst>
         </p:spPr>
+        <p:txBody>
+          <a:bodyPr/>
+          <a:lstStyle/>
+          <a:p>
+            <a:endParaRPr lang="en-GB"/>
+          </a:p>
+        </p:txBody>
       </p:sp>
       <p:sp>
         <p:nvSpPr>
@@ -13491,6 +14317,13 @@
             <a:prstDash val="solid"/>
           </a:ln>
         </p:spPr>
+        <p:txBody>
+          <a:bodyPr/>
+          <a:lstStyle/>
+          <a:p>
+            <a:endParaRPr lang="en-GB"/>
+          </a:p>
+        </p:txBody>
       </p:sp>
       <p:sp>
         <p:nvSpPr>
@@ -13513,7 +14346,7 @@
           <a:bodyPr wrap="square" lIns="0" tIns="0" rIns="0" bIns="0" rtlCol="0" anchor="ctr"/>
           <a:lstStyle/>
           <a:p>
-            <a:pPr algn="ctr" indent="0" marL="0">
+            <a:pPr marL="0" indent="0" algn="ctr">
               <a:buNone/>
             </a:pPr>
             <a:r>
@@ -13552,7 +14385,7 @@
           <a:bodyPr wrap="square" rtlCol="0" anchor="ctr"/>
           <a:lstStyle/>
           <a:p>
-            <a:pPr algn="ctr" indent="0" marL="0">
+            <a:pPr marL="0" indent="0" algn="ctr">
               <a:buNone/>
             </a:pPr>
             <a:r>
@@ -13591,7 +14424,7 @@
           <a:bodyPr wrap="square" rtlCol="0" anchor="ctr"/>
           <a:lstStyle/>
           <a:p>
-            <a:pPr indent="0" marL="0">
+            <a:pPr marL="0" indent="0">
               <a:buNone/>
             </a:pPr>
             <a:r>
@@ -13608,13 +14441,13 @@
             <a:endParaRPr lang="en-US" sz="1100" dirty="0"/>
           </a:p>
           <a:p>
-            <a:pPr indent="0" marL="0">
+            <a:pPr marL="0" indent="0">
               <a:buNone/>
             </a:pPr>
             <a:endParaRPr lang="en-US" sz="1100" dirty="0"/>
           </a:p>
           <a:p>
-            <a:pPr indent="0" marL="0">
+            <a:pPr marL="0" indent="0">
               <a:buNone/>
             </a:pPr>
             <a:r>
@@ -13631,7 +14464,7 @@
             <a:endParaRPr lang="en-US" sz="1100" dirty="0"/>
           </a:p>
           <a:p>
-            <a:pPr indent="0" marL="0">
+            <a:pPr marL="0" indent="0">
               <a:buNone/>
             </a:pPr>
             <a:r>
@@ -13673,13 +14506,20 @@
             <a:prstDash val="solid"/>
           </a:ln>
           <a:effectLst>
-            <a:outerShdw sx="100000" sy="100000" kx="0" ky="0" algn="bl" rotWithShape="0" blurRad="63500" dist="25400" dir="8100000">
+            <a:outerShdw blurRad="63500" dist="25400" dir="8100000" algn="bl" rotWithShape="0">
               <a:srgbClr val="000000">
                 <a:alpha val="10000"/>
               </a:srgbClr>
             </a:outerShdw>
           </a:effectLst>
         </p:spPr>
+        <p:txBody>
+          <a:bodyPr/>
+          <a:lstStyle/>
+          <a:p>
+            <a:endParaRPr lang="en-GB"/>
+          </a:p>
+        </p:txBody>
       </p:sp>
       <p:sp>
         <p:nvSpPr>
@@ -13702,7 +14542,7 @@
           <a:bodyPr wrap="square" rtlCol="0" anchor="ctr"/>
           <a:lstStyle/>
           <a:p>
-            <a:pPr indent="0" marL="0">
+            <a:pPr marL="0" indent="0">
               <a:buNone/>
             </a:pPr>
             <a:r>
@@ -13741,7 +14581,7 @@
           <a:bodyPr wrap="square" rtlCol="0" anchor="ctr"/>
           <a:lstStyle/>
           <a:p>
-            <a:pPr indent="0" marL="0">
+            <a:pPr marL="0" indent="0">
               <a:buNone/>
             </a:pPr>
             <a:r>
@@ -13758,7 +14598,7 @@
             <a:endParaRPr lang="en-US" sz="1050" dirty="0"/>
           </a:p>
           <a:p>
-            <a:pPr indent="0" marL="0">
+            <a:pPr marL="0" indent="0">
               <a:buNone/>
             </a:pPr>
             <a:r>
@@ -13775,7 +14615,7 @@
             <a:endParaRPr lang="en-US" sz="1050" dirty="0"/>
           </a:p>
           <a:p>
-            <a:pPr indent="0" marL="0">
+            <a:pPr marL="0" indent="0">
               <a:buNone/>
             </a:pPr>
             <a:r>
@@ -13814,7 +14654,7 @@
           <a:bodyPr wrap="square" rtlCol="0" anchor="ctr"/>
           <a:lstStyle/>
           <a:p>
-            <a:pPr algn="r" indent="0" marL="0">
+            <a:pPr marL="0" indent="0" algn="r">
               <a:buNone/>
             </a:pPr>
             <a:r>
@@ -13848,6 +14688,7 @@
         <a:solidFill>
           <a:srgbClr val="EDF4E8"/>
         </a:solidFill>
+        <a:effectLst/>
       </p:bgPr>
     </p:bg>
     <p:spTree>
@@ -13885,7 +14726,7 @@
           <a:bodyPr wrap="square" lIns="0" tIns="0" rIns="0" bIns="0" rtlCol="0" anchor="ctr"/>
           <a:lstStyle/>
           <a:p>
-            <a:pPr algn="l" indent="0" marL="0">
+            <a:pPr marL="0" indent="0" algn="l">
               <a:buNone/>
             </a:pPr>
             <a:r>
@@ -13927,6 +14768,13 @@
             <a:prstDash val="solid"/>
           </a:ln>
         </p:spPr>
+        <p:txBody>
+          <a:bodyPr/>
+          <a:lstStyle/>
+          <a:p>
+            <a:endParaRPr lang="en-GB"/>
+          </a:p>
+        </p:txBody>
       </p:sp>
       <p:sp>
         <p:nvSpPr>
@@ -13952,6 +14800,13 @@
             <a:prstDash val="dashDot"/>
           </a:ln>
         </p:spPr>
+        <p:txBody>
+          <a:bodyPr/>
+          <a:lstStyle/>
+          <a:p>
+            <a:endParaRPr lang="en-GB" dirty="0"/>
+          </a:p>
+        </p:txBody>
       </p:sp>
       <p:sp>
         <p:nvSpPr>
@@ -13974,7 +14829,7 @@
           <a:bodyPr wrap="square" rtlCol="0" anchor="ctr"/>
           <a:lstStyle/>
           <a:p>
-            <a:pPr algn="ctr" indent="0" marL="0">
+            <a:pPr marL="0" indent="0" algn="ctr">
               <a:buNone/>
             </a:pPr>
             <a:r>
@@ -13991,7 +14846,7 @@
             <a:endParaRPr lang="en-US" sz="1100" dirty="0"/>
           </a:p>
           <a:p>
-            <a:pPr algn="ctr" indent="0" marL="0">
+            <a:pPr marL="0" indent="0" algn="ctr">
               <a:buNone/>
             </a:pPr>
             <a:r>
@@ -14030,7 +14885,7 @@
           <a:bodyPr wrap="square" lIns="0" tIns="0" rIns="0" bIns="0" rtlCol="0" anchor="ctr"/>
           <a:lstStyle/>
           <a:p>
-            <a:pPr indent="0" marL="0">
+            <a:pPr marL="0" indent="0">
               <a:buNone/>
             </a:pPr>
             <a:r>
@@ -14098,7 +14953,7 @@
               <a:buChar char="•"/>
             </a:pPr>
             <a:r>
-              <a:rPr lang="en-US" sz="1150" dirty="0">
+              <a:rPr lang="en-US" sz="1150" dirty="0" err="1">
                 <a:solidFill>
                   <a:srgbClr val="1E2D1E"/>
                 </a:solidFill>
@@ -14106,18 +14961,8 @@
                 <a:ea typeface="Calibri" pitchFamily="34" charset="-122"/>
                 <a:cs typeface="Calibri" pitchFamily="34" charset="-120"/>
               </a:rPr>
-              <a:t>Адаптивная сетка — удобна на любом экране</a:t>
-            </a:r>
-            <a:endParaRPr lang="en-US" sz="1150" dirty="0"/>
-          </a:p>
-          <a:p>
-            <a:pPr marL="342900" indent="-342900">
-              <a:spcAft>
-                <a:spcPts val="700"/>
-              </a:spcAft>
-              <a:buSzPct val="100000"/>
-              <a:buChar char="•"/>
-            </a:pPr>
+              <a:t>Форма</a:t>
+            </a:r>
             <a:r>
               <a:rPr lang="en-US" sz="1150" dirty="0">
                 <a:solidFill>
@@ -14127,7 +14972,7 @@
                 <a:ea typeface="Calibri" pitchFamily="34" charset="-122"/>
                 <a:cs typeface="Calibri" pitchFamily="34" charset="-120"/>
               </a:rPr>
-              <a:t>Форма отправляет данные методом GET — ссылку можно сохранить в закладки</a:t>
+              <a:t> отправляет данные методом GET — ссылку можно сохранить в закладки</a:t>
             </a:r>
             <a:endParaRPr lang="en-US" sz="1150" dirty="0"/>
           </a:p>
@@ -14199,13 +15044,20 @@
             <a:prstDash val="solid"/>
           </a:ln>
           <a:effectLst>
-            <a:outerShdw sx="100000" sy="100000" kx="0" ky="0" algn="bl" rotWithShape="0" blurRad="63500" dist="25400" dir="8100000">
+            <a:outerShdw blurRad="63500" dist="25400" dir="8100000" algn="bl" rotWithShape="0">
               <a:srgbClr val="000000">
                 <a:alpha val="10000"/>
               </a:srgbClr>
             </a:outerShdw>
           </a:effectLst>
         </p:spPr>
+        <p:txBody>
+          <a:bodyPr/>
+          <a:lstStyle/>
+          <a:p>
+            <a:endParaRPr lang="en-GB"/>
+          </a:p>
+        </p:txBody>
       </p:sp>
       <p:sp>
         <p:nvSpPr>
@@ -14228,7 +15080,7 @@
           <a:bodyPr wrap="square" rtlCol="0" anchor="ctr"/>
           <a:lstStyle/>
           <a:p>
-            <a:pPr indent="0" marL="0">
+            <a:pPr marL="0" indent="0">
               <a:buNone/>
             </a:pPr>
             <a:r>
@@ -14240,12 +15092,42 @@
                 <a:ea typeface="Consolas" pitchFamily="34" charset="-122"/>
                 <a:cs typeface="Consolas" pitchFamily="34" charset="-120"/>
               </a:rPr>
-              <a:t>localhost:8000 /  — форма выбора ингредиентов</a:t>
+              <a:t>/home  — форма выбора ингредиентов</a:t>
             </a:r>
             <a:endParaRPr lang="en-US" sz="1000" dirty="0"/>
           </a:p>
         </p:txBody>
       </p:sp>
+      <p:pic>
+        <p:nvPicPr>
+          <p:cNvPr id="13" name="Рисунок 12">
+            <a:extLst>
+              <a:ext uri="{FF2B5EF4-FFF2-40B4-BE49-F238E27FC236}">
+                <a16:creationId xmlns:a16="http://schemas.microsoft.com/office/drawing/2014/main" id="{609B1CCD-5FEE-4375-CAA1-C36887810E66}"/>
+              </a:ext>
+            </a:extLst>
+          </p:cNvPr>
+          <p:cNvPicPr>
+            <a:picLocks noChangeAspect="1"/>
+          </p:cNvPicPr>
+          <p:nvPr/>
+        </p:nvPicPr>
+        <p:blipFill>
+          <a:blip r:embed="rId3"/>
+          <a:stretch>
+            <a:fillRect/>
+          </a:stretch>
+        </p:blipFill>
+        <p:spPr>
+          <a:xfrm>
+            <a:off x="320040" y="954520"/>
+            <a:ext cx="5029200" cy="3416312"/>
+          </a:xfrm>
+          <a:prstGeom prst="rect">
+            <a:avLst/>
+          </a:prstGeom>
+        </p:spPr>
+      </p:pic>
     </p:spTree>
   </p:cSld>
   <p:clrMapOvr>
@@ -14262,6 +15144,7 @@
         <a:solidFill>
           <a:srgbClr val="EDF4E8"/>
         </a:solidFill>
+        <a:effectLst/>
       </p:bgPr>
     </p:bg>
     <p:spTree>
@@ -14299,7 +15182,7 @@
           <a:bodyPr wrap="square" lIns="0" tIns="0" rIns="0" bIns="0" rtlCol="0" anchor="ctr"/>
           <a:lstStyle/>
           <a:p>
-            <a:pPr algn="l" indent="0" marL="0">
+            <a:pPr marL="0" indent="0" algn="l">
               <a:buNone/>
             </a:pPr>
             <a:r>
@@ -14311,7 +15194,18 @@
                 <a:ea typeface="Calibri" pitchFamily="34" charset="-122"/>
                 <a:cs typeface="Calibri" pitchFamily="34" charset="-120"/>
               </a:rPr>
-              <a:t>Интерфейс: страница результатов</a:t>
+              <a:t>Интерфейс: </a:t>
+            </a:r>
+            <a:r>
+              <a:rPr lang="ru-RU" sz="2600" b="1" dirty="0">
+                <a:solidFill>
+                  <a:srgbClr val="2C5F2D"/>
+                </a:solidFill>
+                <a:latin typeface="Calibri" pitchFamily="34" charset="0"/>
+                <a:ea typeface="Calibri" pitchFamily="34" charset="-122"/>
+                <a:cs typeface="Calibri" pitchFamily="34" charset="-120"/>
+              </a:rPr>
+              <a:t>страница рецепта</a:t>
             </a:r>
             <a:endParaRPr lang="en-US" sz="2600" dirty="0"/>
           </a:p>
@@ -14341,6 +15235,13 @@
             <a:prstDash val="solid"/>
           </a:ln>
         </p:spPr>
+        <p:txBody>
+          <a:bodyPr/>
+          <a:lstStyle/>
+          <a:p>
+            <a:endParaRPr lang="en-GB"/>
+          </a:p>
+        </p:txBody>
       </p:sp>
       <p:sp>
         <p:nvSpPr>
@@ -14366,6 +15267,13 @@
             <a:prstDash val="dashDot"/>
           </a:ln>
         </p:spPr>
+        <p:txBody>
+          <a:bodyPr/>
+          <a:lstStyle/>
+          <a:p>
+            <a:endParaRPr lang="en-GB"/>
+          </a:p>
+        </p:txBody>
       </p:sp>
       <p:sp>
         <p:nvSpPr>
@@ -14388,7 +15296,7 @@
           <a:bodyPr wrap="square" rtlCol="0" anchor="ctr"/>
           <a:lstStyle/>
           <a:p>
-            <a:pPr algn="ctr" indent="0" marL="0">
+            <a:pPr marL="0" indent="0" algn="ctr">
               <a:buNone/>
             </a:pPr>
             <a:r>
@@ -14405,7 +15313,7 @@
             <a:endParaRPr lang="en-US" sz="1100" dirty="0"/>
           </a:p>
           <a:p>
-            <a:pPr algn="ctr" indent="0" marL="0">
+            <a:pPr marL="0" indent="0" algn="ctr">
               <a:buNone/>
             </a:pPr>
             <a:r>
@@ -14444,7 +15352,7 @@
           <a:bodyPr wrap="square" lIns="0" tIns="0" rIns="0" bIns="0" rtlCol="0" anchor="ctr"/>
           <a:lstStyle/>
           <a:p>
-            <a:pPr indent="0" marL="0">
+            <a:pPr marL="0" indent="0">
               <a:buNone/>
             </a:pPr>
             <a:r>
@@ -14512,7 +15420,7 @@
               <a:buChar char="•"/>
             </a:pPr>
             <a:r>
-              <a:rPr lang="en-US" sz="1150" dirty="0">
+              <a:rPr lang="ru-RU" sz="1150" dirty="0">
                 <a:solidFill>
                   <a:srgbClr val="1E2D1E"/>
                 </a:solidFill>
@@ -14520,9 +15428,8 @@
                 <a:ea typeface="Calibri" pitchFamily="34" charset="-122"/>
                 <a:cs typeface="Calibri" pitchFamily="34" charset="-120"/>
               </a:rPr>
-              <a:t>Индикатор: «У вас есть 4 из 5 ингредиентов»</a:t>
-            </a:r>
-            <a:endParaRPr lang="en-US" sz="1150" dirty="0"/>
+              <a:t>Название блюда с его кратким описанием</a:t>
+            </a:r>
           </a:p>
           <a:p>
             <a:pPr marL="342900" indent="-342900">
@@ -14533,17 +15440,15 @@
               <a:buChar char="•"/>
             </a:pPr>
             <a:r>
-              <a:rPr lang="en-US" sz="1150" dirty="0">
+              <a:rPr lang="ru-RU" sz="1150" dirty="0">
                 <a:solidFill>
                   <a:srgbClr val="1E2D1E"/>
                 </a:solidFill>
                 <a:latin typeface="Calibri" pitchFamily="34" charset="0"/>
-                <a:ea typeface="Calibri" pitchFamily="34" charset="-122"/>
                 <a:cs typeface="Calibri" pitchFamily="34" charset="-120"/>
               </a:rPr>
-              <a:t>Блок «Чего не хватает» — список дефицитных продуктов</a:t>
-            </a:r>
-            <a:endParaRPr lang="en-US" sz="1150" dirty="0"/>
+              <a:t>Список ингредиентов в рецепте</a:t>
+            </a:r>
           </a:p>
           <a:p>
             <a:pPr marL="342900" indent="-342900">
@@ -14554,36 +15459,14 @@
               <a:buChar char="•"/>
             </a:pPr>
             <a:r>
-              <a:rPr lang="en-US" sz="1150" dirty="0">
+              <a:rPr lang="ru-RU" sz="1150" dirty="0">
                 <a:solidFill>
                   <a:srgbClr val="1E2D1E"/>
                 </a:solidFill>
                 <a:latin typeface="Calibri" pitchFamily="34" charset="0"/>
-                <a:ea typeface="Calibri" pitchFamily="34" charset="-122"/>
                 <a:cs typeface="Calibri" pitchFamily="34" charset="-120"/>
               </a:rPr>
-              <a:t>«Можно готовить прямо сейчас!» — при полном совпадении</a:t>
-            </a:r>
-            <a:endParaRPr lang="en-US" sz="1150" dirty="0"/>
-          </a:p>
-          <a:p>
-            <a:pPr marL="342900" indent="-342900">
-              <a:spcAft>
-                <a:spcPts val="700"/>
-              </a:spcAft>
-              <a:buSzPct val="100000"/>
-              <a:buChar char="•"/>
-            </a:pPr>
-            <a:r>
-              <a:rPr lang="en-US" sz="1150" dirty="0">
-                <a:solidFill>
-                  <a:srgbClr val="1E2D1E"/>
-                </a:solidFill>
-                <a:latin typeface="Calibri" pitchFamily="34" charset="0"/>
-                <a:ea typeface="Calibri" pitchFamily="34" charset="-122"/>
-                <a:cs typeface="Calibri" pitchFamily="34" charset="-120"/>
-              </a:rPr>
-              <a:t>«Расширьте выбор» — если совпадений нет вовсе</a:t>
+              <a:t>Строка «Нужно докупить»</a:t>
             </a:r>
             <a:endParaRPr lang="en-US" sz="1150" dirty="0"/>
           </a:p>
@@ -14613,13 +15496,20 @@
             <a:prstDash val="solid"/>
           </a:ln>
           <a:effectLst>
-            <a:outerShdw sx="100000" sy="100000" kx="0" ky="0" algn="bl" rotWithShape="0" blurRad="63500" dist="25400" dir="8100000">
+            <a:outerShdw blurRad="63500" dist="25400" dir="8100000" algn="bl" rotWithShape="0">
               <a:srgbClr val="000000">
                 <a:alpha val="10000"/>
               </a:srgbClr>
             </a:outerShdw>
           </a:effectLst>
         </p:spPr>
+        <p:txBody>
+          <a:bodyPr/>
+          <a:lstStyle/>
+          <a:p>
+            <a:endParaRPr lang="en-GB"/>
+          </a:p>
+        </p:txBody>
       </p:sp>
       <p:sp>
         <p:nvSpPr>
@@ -14642,9 +15532,6 @@
           <a:bodyPr wrap="square" rtlCol="0" anchor="ctr"/>
           <a:lstStyle/>
           <a:p>
-            <a:pPr indent="0" marL="0">
-              <a:buNone/>
-            </a:pPr>
             <a:r>
               <a:rPr lang="en-US" sz="1000" dirty="0">
                 <a:solidFill>
@@ -14654,12 +15541,43 @@
                 <a:ea typeface="Consolas" pitchFamily="34" charset="-122"/>
                 <a:cs typeface="Consolas" pitchFamily="34" charset="-120"/>
               </a:rPr>
-              <a:t>localhost:8000 /results/?ingredients=3&amp;ingredients=7</a:t>
+              <a:t>/home/?ingredients=3&amp;ingredients=7</a:t>
             </a:r>
             <a:endParaRPr lang="en-US" sz="1000" dirty="0"/>
           </a:p>
         </p:txBody>
       </p:sp>
+      <p:pic>
+        <p:nvPicPr>
+          <p:cNvPr id="11" name="Рисунок 10">
+            <a:extLst>
+              <a:ext uri="{FF2B5EF4-FFF2-40B4-BE49-F238E27FC236}">
+                <a16:creationId xmlns:a16="http://schemas.microsoft.com/office/drawing/2014/main" id="{6332B7FC-5CC3-451A-A2FF-BD5601A8479D}"/>
+              </a:ext>
+            </a:extLst>
+          </p:cNvPr>
+          <p:cNvPicPr>
+            <a:picLocks noChangeAspect="1"/>
+          </p:cNvPicPr>
+          <p:nvPr/>
+        </p:nvPicPr>
+        <p:blipFill>
+          <a:blip r:embed="rId3"/>
+          <a:srcRect b="20199"/>
+          <a:stretch>
+            <a:fillRect/>
+          </a:stretch>
+        </p:blipFill>
+        <p:spPr>
+          <a:xfrm>
+            <a:off x="320040" y="987552"/>
+            <a:ext cx="5029200" cy="3420000"/>
+          </a:xfrm>
+          <a:prstGeom prst="rect">
+            <a:avLst/>
+          </a:prstGeom>
+        </p:spPr>
+      </p:pic>
     </p:spTree>
   </p:cSld>
   <p:clrMapOvr>
@@ -14961,4 +15879,319 @@
     </a:ext>
   </a:extLst>
 </a:theme>
+</file>
+
+<file path=ppt/theme/theme2.xml><?xml version="1.0" encoding="utf-8"?>
+<a:theme xmlns:a="http://schemas.openxmlformats.org/drawingml/2006/main" name="Тема Office">
+  <a:themeElements>
+    <a:clrScheme name="Стандартная">
+      <a:dk1>
+        <a:sysClr val="windowText" lastClr="000000"/>
+      </a:dk1>
+      <a:lt1>
+        <a:sysClr val="window" lastClr="FFFFFF"/>
+      </a:lt1>
+      <a:dk2>
+        <a:srgbClr val="0E2841"/>
+      </a:dk2>
+      <a:lt2>
+        <a:srgbClr val="E8E8E8"/>
+      </a:lt2>
+      <a:accent1>
+        <a:srgbClr val="156082"/>
+      </a:accent1>
+      <a:accent2>
+        <a:srgbClr val="E97132"/>
+      </a:accent2>
+      <a:accent3>
+        <a:srgbClr val="196B24"/>
+      </a:accent3>
+      <a:accent4>
+        <a:srgbClr val="0F9ED5"/>
+      </a:accent4>
+      <a:accent5>
+        <a:srgbClr val="A02B93"/>
+      </a:accent5>
+      <a:accent6>
+        <a:srgbClr val="4EA72E"/>
+      </a:accent6>
+      <a:hlink>
+        <a:srgbClr val="467886"/>
+      </a:hlink>
+      <a:folHlink>
+        <a:srgbClr val="96607D"/>
+      </a:folHlink>
+    </a:clrScheme>
+    <a:fontScheme name="Стандартная">
+      <a:majorFont>
+        <a:latin typeface="Aptos Display" panose="02110004020202020204"/>
+        <a:ea typeface=""/>
+        <a:cs typeface=""/>
+        <a:font script="Jpan" typeface="游ゴシック Light"/>
+        <a:font script="Hang" typeface="맑은 고딕"/>
+        <a:font script="Hans" typeface="等线 Light"/>
+        <a:font script="Hant" typeface="新細明體"/>
+        <a:font script="Arab" typeface="Times New Roman"/>
+        <a:font script="Hebr" typeface="Times New Roman"/>
+        <a:font script="Thai" typeface="Angsana New"/>
+        <a:font script="Ethi" typeface="Nyala"/>
+        <a:font script="Beng" typeface="Vrinda"/>
+        <a:font script="Gujr" typeface="Shruti"/>
+        <a:font script="Khmr" typeface="MoolBoran"/>
+        <a:font script="Knda" typeface="Tunga"/>
+        <a:font script="Guru" typeface="Raavi"/>
+        <a:font script="Cans" typeface="Euphemia"/>
+        <a:font script="Cher" typeface="Plantagenet Cherokee"/>
+        <a:font script="Yiii" typeface="Microsoft Yi Baiti"/>
+        <a:font script="Tibt" typeface="Microsoft Himalaya"/>
+        <a:font script="Thaa" typeface="MV Boli"/>
+        <a:font script="Deva" typeface="Mangal"/>
+        <a:font script="Telu" typeface="Gautami"/>
+        <a:font script="Taml" typeface="Latha"/>
+        <a:font script="Syrc" typeface="Estrangelo Edessa"/>
+        <a:font script="Orya" typeface="Kalinga"/>
+        <a:font script="Mlym" typeface="Kartika"/>
+        <a:font script="Laoo" typeface="DokChampa"/>
+        <a:font script="Sinh" typeface="Iskoola Pota"/>
+        <a:font script="Mong" typeface="Mongolian Baiti"/>
+        <a:font script="Viet" typeface="Times New Roman"/>
+        <a:font script="Uigh" typeface="Microsoft Uighur"/>
+        <a:font script="Geor" typeface="Sylfaen"/>
+        <a:font script="Armn" typeface="Arial"/>
+        <a:font script="Bugi" typeface="Leelawadee UI"/>
+        <a:font script="Bopo" typeface="Microsoft JhengHei"/>
+        <a:font script="Java" typeface="Javanese Text"/>
+        <a:font script="Lisu" typeface="Segoe UI"/>
+        <a:font script="Mymr" typeface="Myanmar Text"/>
+        <a:font script="Nkoo" typeface="Ebrima"/>
+        <a:font script="Olck" typeface="Nirmala UI"/>
+        <a:font script="Osma" typeface="Ebrima"/>
+        <a:font script="Phag" typeface="Phagspa"/>
+        <a:font script="Syrn" typeface="Estrangelo Edessa"/>
+        <a:font script="Syrj" typeface="Estrangelo Edessa"/>
+        <a:font script="Syre" typeface="Estrangelo Edessa"/>
+        <a:font script="Sora" typeface="Nirmala UI"/>
+        <a:font script="Tale" typeface="Microsoft Tai Le"/>
+        <a:font script="Talu" typeface="Microsoft New Tai Lue"/>
+        <a:font script="Tfng" typeface="Ebrima"/>
+      </a:majorFont>
+      <a:minorFont>
+        <a:latin typeface="Aptos" panose="02110004020202020204"/>
+        <a:ea typeface=""/>
+        <a:cs typeface=""/>
+        <a:font script="Jpan" typeface="游ゴシック"/>
+        <a:font script="Hang" typeface="맑은 고딕"/>
+        <a:font script="Hans" typeface="等线"/>
+        <a:font script="Hant" typeface="新細明體"/>
+        <a:font script="Arab" typeface="Arial"/>
+        <a:font script="Hebr" typeface="Arial"/>
+        <a:font script="Thai" typeface="Cordia New"/>
+        <a:font script="Ethi" typeface="Nyala"/>
+        <a:font script="Beng" typeface="Vrinda"/>
+        <a:font script="Gujr" typeface="Shruti"/>
+        <a:font script="Khmr" typeface="DaunPenh"/>
+        <a:font script="Knda" typeface="Tunga"/>
+        <a:font script="Guru" typeface="Raavi"/>
+        <a:font script="Cans" typeface="Euphemia"/>
+        <a:font script="Cher" typeface="Plantagenet Cherokee"/>
+        <a:font script="Yiii" typeface="Microsoft Yi Baiti"/>
+        <a:font script="Tibt" typeface="Microsoft Himalaya"/>
+        <a:font script="Thaa" typeface="MV Boli"/>
+        <a:font script="Deva" typeface="Mangal"/>
+        <a:font script="Telu" typeface="Gautami"/>
+        <a:font script="Taml" typeface="Latha"/>
+        <a:font script="Syrc" typeface="Estrangelo Edessa"/>
+        <a:font script="Orya" typeface="Kalinga"/>
+        <a:font script="Mlym" typeface="Kartika"/>
+        <a:font script="Laoo" typeface="DokChampa"/>
+        <a:font script="Sinh" typeface="Iskoola Pota"/>
+        <a:font script="Mong" typeface="Mongolian Baiti"/>
+        <a:font script="Viet" typeface="Arial"/>
+        <a:font script="Uigh" typeface="Microsoft Uighur"/>
+        <a:font script="Geor" typeface="Sylfaen"/>
+        <a:font script="Armn" typeface="Arial"/>
+        <a:font script="Bugi" typeface="Leelawadee UI"/>
+        <a:font script="Bopo" typeface="Microsoft JhengHei"/>
+        <a:font script="Java" typeface="Javanese Text"/>
+        <a:font script="Lisu" typeface="Segoe UI"/>
+        <a:font script="Mymr" typeface="Myanmar Text"/>
+        <a:font script="Nkoo" typeface="Ebrima"/>
+        <a:font script="Olck" typeface="Nirmala UI"/>
+        <a:font script="Osma" typeface="Ebrima"/>
+        <a:font script="Phag" typeface="Phagspa"/>
+        <a:font script="Syrn" typeface="Estrangelo Edessa"/>
+        <a:font script="Syrj" typeface="Estrangelo Edessa"/>
+        <a:font script="Syre" typeface="Estrangelo Edessa"/>
+        <a:font script="Sora" typeface="Nirmala UI"/>
+        <a:font script="Tale" typeface="Microsoft Tai Le"/>
+        <a:font script="Talu" typeface="Microsoft New Tai Lue"/>
+        <a:font script="Tfng" typeface="Ebrima"/>
+      </a:minorFont>
+    </a:fontScheme>
+    <a:fmtScheme name="Стандартная">
+      <a:fillStyleLst>
+        <a:solidFill>
+          <a:schemeClr val="phClr"/>
+        </a:solidFill>
+        <a:gradFill rotWithShape="1">
+          <a:gsLst>
+            <a:gs pos="0">
+              <a:schemeClr val="phClr">
+                <a:lumMod val="110000"/>
+                <a:satMod val="105000"/>
+                <a:tint val="67000"/>
+              </a:schemeClr>
+            </a:gs>
+            <a:gs pos="50000">
+              <a:schemeClr val="phClr">
+                <a:lumMod val="105000"/>
+                <a:satMod val="103000"/>
+                <a:tint val="73000"/>
+              </a:schemeClr>
+            </a:gs>
+            <a:gs pos="100000">
+              <a:schemeClr val="phClr">
+                <a:lumMod val="105000"/>
+                <a:satMod val="109000"/>
+                <a:tint val="81000"/>
+              </a:schemeClr>
+            </a:gs>
+          </a:gsLst>
+          <a:lin ang="5400000" scaled="0"/>
+        </a:gradFill>
+        <a:gradFill rotWithShape="1">
+          <a:gsLst>
+            <a:gs pos="0">
+              <a:schemeClr val="phClr">
+                <a:satMod val="103000"/>
+                <a:lumMod val="102000"/>
+                <a:tint val="94000"/>
+              </a:schemeClr>
+            </a:gs>
+            <a:gs pos="50000">
+              <a:schemeClr val="phClr">
+                <a:satMod val="110000"/>
+                <a:lumMod val="100000"/>
+                <a:shade val="100000"/>
+              </a:schemeClr>
+            </a:gs>
+            <a:gs pos="100000">
+              <a:schemeClr val="phClr">
+                <a:lumMod val="99000"/>
+                <a:satMod val="120000"/>
+                <a:shade val="78000"/>
+              </a:schemeClr>
+            </a:gs>
+          </a:gsLst>
+          <a:lin ang="5400000" scaled="0"/>
+        </a:gradFill>
+      </a:fillStyleLst>
+      <a:lnStyleLst>
+        <a:ln w="12700" cap="flat" cmpd="sng" algn="ctr">
+          <a:solidFill>
+            <a:schemeClr val="phClr"/>
+          </a:solidFill>
+          <a:prstDash val="solid"/>
+          <a:miter lim="800000"/>
+        </a:ln>
+        <a:ln w="19050" cap="flat" cmpd="sng" algn="ctr">
+          <a:solidFill>
+            <a:schemeClr val="phClr"/>
+          </a:solidFill>
+          <a:prstDash val="solid"/>
+          <a:miter lim="800000"/>
+        </a:ln>
+        <a:ln w="25400" cap="flat" cmpd="sng" algn="ctr">
+          <a:solidFill>
+            <a:schemeClr val="phClr"/>
+          </a:solidFill>
+          <a:prstDash val="solid"/>
+          <a:miter lim="800000"/>
+        </a:ln>
+      </a:lnStyleLst>
+      <a:effectStyleLst>
+        <a:effectStyle>
+          <a:effectLst/>
+        </a:effectStyle>
+        <a:effectStyle>
+          <a:effectLst/>
+        </a:effectStyle>
+        <a:effectStyle>
+          <a:effectLst>
+            <a:outerShdw blurRad="57150" dist="19050" dir="5400000" algn="ctr" rotWithShape="0">
+              <a:srgbClr val="000000">
+                <a:alpha val="63000"/>
+              </a:srgbClr>
+            </a:outerShdw>
+          </a:effectLst>
+        </a:effectStyle>
+      </a:effectStyleLst>
+      <a:bgFillStyleLst>
+        <a:solidFill>
+          <a:schemeClr val="phClr"/>
+        </a:solidFill>
+        <a:solidFill>
+          <a:schemeClr val="phClr">
+            <a:tint val="95000"/>
+            <a:satMod val="170000"/>
+          </a:schemeClr>
+        </a:solidFill>
+        <a:gradFill rotWithShape="1">
+          <a:gsLst>
+            <a:gs pos="0">
+              <a:schemeClr val="phClr">
+                <a:tint val="93000"/>
+                <a:satMod val="150000"/>
+                <a:shade val="98000"/>
+                <a:lumMod val="102000"/>
+              </a:schemeClr>
+            </a:gs>
+            <a:gs pos="50000">
+              <a:schemeClr val="phClr">
+                <a:tint val="98000"/>
+                <a:satMod val="130000"/>
+                <a:shade val="90000"/>
+                <a:lumMod val="103000"/>
+              </a:schemeClr>
+            </a:gs>
+            <a:gs pos="100000">
+              <a:schemeClr val="phClr">
+                <a:shade val="63000"/>
+                <a:satMod val="120000"/>
+              </a:schemeClr>
+            </a:gs>
+          </a:gsLst>
+          <a:lin ang="5400000" scaled="0"/>
+        </a:gradFill>
+      </a:bgFillStyleLst>
+    </a:fmtScheme>
+  </a:themeElements>
+  <a:objectDefaults>
+    <a:lnDef>
+      <a:spPr/>
+      <a:bodyPr/>
+      <a:lstStyle/>
+      <a:style>
+        <a:lnRef idx="2">
+          <a:schemeClr val="accent1"/>
+        </a:lnRef>
+        <a:fillRef idx="0">
+          <a:schemeClr val="accent1"/>
+        </a:fillRef>
+        <a:effectRef idx="1">
+          <a:schemeClr val="accent1"/>
+        </a:effectRef>
+        <a:fontRef idx="minor">
+          <a:schemeClr val="tx1"/>
+        </a:fontRef>
+      </a:style>
+    </a:lnDef>
+  </a:objectDefaults>
+  <a:extraClrSchemeLst/>
+  <a:extLst>
+    <a:ext uri="{05A4C25C-085E-4340-85A3-A5531E510DB2}">
+      <thm15:themeFamily xmlns:thm15="http://schemas.microsoft.com/office/thememl/2012/main" name="Office Theme" id="{2E142A2C-CD16-42D6-873A-C26D2A0506FA}" vid="{1BDDFF52-6CD6-40A5-AB3C-68EB2F1E4D0A}"/>
+    </a:ext>
+  </a:extLst>
+</a:theme>
 </file>